--- a/P1/Index-Only i Bitmap Index Scan u PostgreSQL.pptx
+++ b/P1/Index-Only i Bitmap Index Scan u PostgreSQL.pptx
@@ -1074,7 +1074,7 @@
           <a:p>
             <a:fld id="{1D8BD707-D9CF-40AE-B4C6-C98DA3205C09}" type="datetimeFigureOut">
               <a:rPr lang="en-US"/>
-              <a:t>5/9/2026</a:t>
+              <a:t>5/11/2026</a:t>
             </a:fld>
             <a:endParaRPr lang="en-US"/>
           </a:p>
@@ -1249,7 +1249,7 @@
           <a:p>
             <a:fld id="{1D8BD707-D9CF-40AE-B4C6-C98DA3205C09}" type="datetimeFigureOut">
               <a:rPr lang="en-US"/>
-              <a:t>5/9/2026</a:t>
+              <a:t>5/11/2026</a:t>
             </a:fld>
             <a:endParaRPr lang="en-US"/>
           </a:p>
@@ -1475,7 +1475,7 @@
           <a:p>
             <a:fld id="{1D8BD707-D9CF-40AE-B4C6-C98DA3205C09}" type="datetimeFigureOut">
               <a:rPr lang="en-US"/>
-              <a:t>5/9/2026</a:t>
+              <a:t>5/11/2026</a:t>
             </a:fld>
             <a:endParaRPr lang="en-US"/>
           </a:p>
@@ -1623,7 +1623,7 @@
           <a:p>
             <a:fld id="{1D8BD707-D9CF-40AE-B4C6-C98DA3205C09}" type="datetimeFigureOut">
               <a:rPr lang="en-US"/>
-              <a:t>5/9/2026</a:t>
+              <a:t>5/11/2026</a:t>
             </a:fld>
             <a:endParaRPr lang="en-US"/>
           </a:p>
@@ -1742,7 +1742,7 @@
           <a:p>
             <a:fld id="{1D8BD707-D9CF-40AE-B4C6-C98DA3205C09}" type="datetimeFigureOut">
               <a:rPr lang="en-US"/>
-              <a:t>5/9/2026</a:t>
+              <a:t>5/11/2026</a:t>
             </a:fld>
             <a:endParaRPr lang="en-US"/>
           </a:p>
@@ -2012,7 +2012,7 @@
           <a:p>
             <a:fld id="{1D8BD707-D9CF-40AE-B4C6-C98DA3205C09}" type="datetimeFigureOut">
               <a:rPr lang="en-US"/>
-              <a:t>5/9/2026</a:t>
+              <a:t>5/11/2026</a:t>
             </a:fld>
             <a:endParaRPr lang="en-US"/>
           </a:p>
@@ -2719,7 +2719,7 @@
         <p:spPr>
           <a:xfrm>
             <a:off x="935448" y="730078"/>
-            <a:ext cx="16050801" cy="1043234"/>
+            <a:ext cx="16050801" cy="843180"/>
           </a:xfrm>
           <a:prstGeom prst="rect">
             <a:avLst/>
@@ -2740,7 +2740,7 @@
               </a:spcBef>
             </a:pPr>
             <a:r>
-              <a:rPr lang="it-IT" sz="6700" b="1" spc="-180" dirty="0">
+              <a:rPr lang="it-IT" sz="5400" b="1" spc="-180" dirty="0">
                 <a:solidFill>
                   <a:srgbClr val="034F82"/>
                 </a:solidFill>
@@ -2750,7 +2750,7 @@
               </a:rPr>
               <a:t>Scenario 1 - Sequential Scan (bez indeksa)</a:t>
             </a:r>
-            <a:endParaRPr sz="6700" b="1" dirty="0">
+            <a:endParaRPr sz="5400" b="1" dirty="0">
               <a:latin typeface="Cambria" panose="02040503050406030204" pitchFamily="18" charset="0"/>
               <a:ea typeface="Cambria" panose="02040503050406030204" pitchFamily="18" charset="0"/>
               <a:cs typeface="Times New Roman"/>
@@ -8132,8 +8132,8 @@
         </p:nvSpPr>
         <p:spPr>
           <a:xfrm>
-            <a:off x="905877" y="803374"/>
-            <a:ext cx="10627360" cy="987425"/>
+            <a:off x="905876" y="803374"/>
+            <a:ext cx="11889374" cy="983603"/>
           </a:xfrm>
           <a:prstGeom prst="rect">
             <a:avLst/>
@@ -8154,23 +8154,39 @@
               </a:spcBef>
             </a:pPr>
             <a:r>
-              <a:rPr spc="-70" dirty="0">
+              <a:rPr b="1" spc="-70" dirty="0" err="1">
                 <a:solidFill>
                   <a:srgbClr val="034F85"/>
                 </a:solidFill>
               </a:rPr>
-              <a:t>Poredenje</a:t>
-            </a:r>
-            <a:r>
-              <a:rPr spc="-135" dirty="0">
+              <a:t>Pored</a:t>
+            </a:r>
+            <a:r>
+              <a:rPr lang="en-US" b="1" spc="-70" dirty="0" err="1">
                 <a:solidFill>
                   <a:srgbClr val="034F85"/>
                 </a:solidFill>
               </a:rPr>
-              <a:t> </a:t>
-            </a:r>
-            <a:r>
-              <a:rPr dirty="0">
+              <a:t>j</a:t>
+            </a:r>
+            <a:r>
+              <a:rPr b="1" spc="-70" dirty="0" err="1">
+                <a:solidFill>
+                  <a:srgbClr val="034F85"/>
+                </a:solidFill>
+              </a:rPr>
+              <a:t>enje</a:t>
+            </a:r>
+            <a:r>
+              <a:rPr b="1" spc="-135" dirty="0">
+                <a:solidFill>
+                  <a:srgbClr val="034F85"/>
+                </a:solidFill>
+              </a:rPr>
+              <a:t> </a:t>
+            </a:r>
+            <a:r>
+              <a:rPr b="1" dirty="0">
                 <a:solidFill>
                   <a:srgbClr val="005095"/>
                 </a:solidFill>
@@ -8178,7 +8194,7 @@
               <a:t>vremena</a:t>
             </a:r>
             <a:r>
-              <a:rPr spc="-275" dirty="0">
+              <a:rPr b="1" spc="-275" dirty="0">
                 <a:solidFill>
                   <a:srgbClr val="005095"/>
                 </a:solidFill>
@@ -8186,7 +8202,7 @@
               <a:t> </a:t>
             </a:r>
             <a:r>
-              <a:rPr spc="-10" dirty="0">
+              <a:rPr b="1" spc="-10" dirty="0">
                 <a:solidFill>
                   <a:srgbClr val="00509A"/>
                 </a:solidFill>
@@ -8357,7 +8373,7 @@
                 <a:ea typeface="Calibri" pitchFamily="34" charset="-122"/>
                 <a:cs typeface="Calibri" pitchFamily="34" charset="-120"/>
               </a:rPr>
-              <a:t>* S2: SET enable_seqscan = OFF korišćen samo za izolaciju; CBO spontano bira Bitmap Index Scan. S4 nije direktno uporediv (SELECT * + drugačiji filter).</a:t>
+              <a:t>* S2: SET enable_seqscan = OFF korišćen samo za izolaciju; CBO spontano bira Bitmap Index Scan.</a:t>
             </a:r>
             <a:endParaRPr lang="en-US" sz="2000" dirty="0">
               <a:solidFill>
@@ -8731,7 +8747,7 @@
       </p:grpSpPr>
       <p:pic>
         <p:nvPicPr>
-          <p:cNvPr id="2" name="object 2"/>
+          <p:cNvPr id="3" name="object 3"/>
           <p:cNvPicPr/>
           <p:nvPr/>
         </p:nvPicPr>
@@ -8743,30 +8759,8 @@
         </p:blipFill>
         <p:spPr>
           <a:xfrm>
-            <a:off x="12881897" y="4162176"/>
-            <a:ext cx="801022" cy="785316"/>
-          </a:xfrm>
-          <a:prstGeom prst="rect">
-            <a:avLst/>
-          </a:prstGeom>
-        </p:spPr>
-      </p:pic>
-      <p:pic>
-        <p:nvPicPr>
-          <p:cNvPr id="3" name="object 3"/>
-          <p:cNvPicPr/>
-          <p:nvPr/>
-        </p:nvPicPr>
-        <p:blipFill>
-          <a:blip r:embed="rId3" cstate="print"/>
-          <a:stretch>
-            <a:fillRect/>
-          </a:stretch>
-        </p:blipFill>
-        <p:spPr>
-          <a:xfrm>
-            <a:off x="6415166" y="4162176"/>
-            <a:ext cx="879554" cy="785316"/>
+            <a:off x="9348549" y="3521075"/>
+            <a:ext cx="1407001" cy="1394916"/>
           </a:xfrm>
           <a:prstGeom prst="rect">
             <a:avLst/>
@@ -8803,62 +8797,14 @@
               </a:spcBef>
             </a:pPr>
             <a:r>
-              <a:rPr sz="6150" spc="75" dirty="0">
+              <a:rPr sz="6150" b="1" spc="75" dirty="0" err="1">
                 <a:solidFill>
                   <a:srgbClr val="0A4D77"/>
                 </a:solidFill>
               </a:rPr>
               <a:t>Zaključak</a:t>
             </a:r>
-            <a:r>
-              <a:rPr sz="6150" spc="325" dirty="0">
-                <a:solidFill>
-                  <a:srgbClr val="0A4D77"/>
-                </a:solidFill>
-              </a:rPr>
-              <a:t> </a:t>
-            </a:r>
-            <a:r>
-              <a:rPr sz="6150" spc="50" dirty="0">
-                <a:solidFill>
-                  <a:srgbClr val="005089"/>
-                </a:solidFill>
-              </a:rPr>
-              <a:t>i</a:t>
-            </a:r>
-            <a:r>
-              <a:rPr sz="6150" spc="55" dirty="0">
-                <a:solidFill>
-                  <a:srgbClr val="005089"/>
-                </a:solidFill>
-              </a:rPr>
-              <a:t> </a:t>
-            </a:r>
-            <a:r>
-              <a:rPr sz="6150" dirty="0">
-                <a:solidFill>
-                  <a:srgbClr val="035680"/>
-                </a:solidFill>
-              </a:rPr>
-              <a:t>praktične</a:t>
-            </a:r>
-            <a:r>
-              <a:rPr sz="6150" spc="459" dirty="0">
-                <a:solidFill>
-                  <a:srgbClr val="035680"/>
-                </a:solidFill>
-              </a:rPr>
-              <a:t> </a:t>
-            </a:r>
-            <a:r>
-              <a:rPr sz="6150" spc="-10" dirty="0">
-                <a:solidFill>
-                  <a:srgbClr val="03568C"/>
-                </a:solidFill>
-              </a:rPr>
-              <a:t>pouke</a:t>
-            </a:r>
-            <a:endParaRPr sz="6150"/>
+            <a:endParaRPr sz="6150" b="1" dirty="0"/>
           </a:p>
         </p:txBody>
       </p:sp>
@@ -8870,8 +8816,8 @@
         </p:nvSpPr>
         <p:spPr>
           <a:xfrm>
-            <a:off x="4441568" y="5188712"/>
-            <a:ext cx="4807585" cy="2059939"/>
+            <a:off x="1670050" y="5197475"/>
+            <a:ext cx="16840200" cy="3118803"/>
           </a:xfrm>
           <a:prstGeom prst="rect">
             <a:avLst/>
@@ -8892,7 +8838,7 @@
               </a:spcBef>
             </a:pPr>
             <a:r>
-              <a:rPr sz="2550" spc="70" dirty="0">
+              <a:rPr sz="3200" spc="70" dirty="0" err="1">
                 <a:solidFill>
                   <a:srgbClr val="0A508C"/>
                 </a:solidFill>
@@ -8902,7 +8848,7 @@
               <a:t>Značaj</a:t>
             </a:r>
             <a:r>
-              <a:rPr sz="2550" spc="-114" dirty="0">
+              <a:rPr sz="3200" spc="-114" dirty="0">
                 <a:solidFill>
                   <a:srgbClr val="0A508C"/>
                 </a:solidFill>
@@ -8912,7 +8858,7 @@
               <a:t> </a:t>
             </a:r>
             <a:r>
-              <a:rPr sz="2550" spc="-10" dirty="0">
+              <a:rPr sz="3200" spc="-10" dirty="0" err="1">
                 <a:solidFill>
                   <a:srgbClr val="035D93"/>
                 </a:solidFill>
@@ -8921,7 +8867,24 @@
               </a:rPr>
               <a:t>održavanja</a:t>
             </a:r>
-            <a:endParaRPr sz="2550" dirty="0">
+            <a:endParaRPr lang="en-US" sz="3200" spc="-10" dirty="0">
+              <a:solidFill>
+                <a:srgbClr val="035D93"/>
+              </a:solidFill>
+              <a:latin typeface="Cambria"/>
+              <a:cs typeface="Cambria"/>
+            </a:endParaRPr>
+          </a:p>
+          <a:p>
+            <a:pPr marR="22860" algn="ctr">
+              <a:lnSpc>
+                <a:spcPts val="3045"/>
+              </a:lnSpc>
+              <a:spcBef>
+                <a:spcPts val="125"/>
+              </a:spcBef>
+            </a:pPr>
+            <a:endParaRPr sz="3200" dirty="0">
               <a:latin typeface="Cambria"/>
               <a:cs typeface="Cambria"/>
             </a:endParaRPr>
@@ -8933,804 +8896,86 @@
               </a:lnSpc>
             </a:pPr>
             <a:r>
-              <a:rPr sz="2550" dirty="0">
+              <a:rPr lang="sr-Latn-RS" sz="3200" dirty="0">
                 <a:solidFill>
                   <a:srgbClr val="333333"/>
                 </a:solidFill>
                 <a:latin typeface="Calibri"/>
                 <a:cs typeface="Calibri"/>
               </a:rPr>
-              <a:t>Index-Only</a:t>
-            </a:r>
-            <a:r>
-              <a:rPr sz="2550" spc="310" dirty="0">
+              <a:t>Ključna p</a:t>
+            </a:r>
+            <a:r>
+              <a:rPr lang="en-US" sz="3200" dirty="0" err="1">
                 <a:solidFill>
                   <a:srgbClr val="333333"/>
                 </a:solidFill>
                 <a:latin typeface="Calibri"/>
                 <a:cs typeface="Calibri"/>
               </a:rPr>
-              <a:t> </a:t>
-            </a:r>
-            <a:r>
-              <a:rPr sz="2550" dirty="0">
+              <a:t>oruka</a:t>
+            </a:r>
+            <a:r>
+              <a:rPr lang="sr-Latn-RS" sz="3200" dirty="0">
                 <a:solidFill>
                   <a:srgbClr val="333333"/>
                 </a:solidFill>
                 <a:latin typeface="Calibri"/>
                 <a:cs typeface="Calibri"/>
               </a:rPr>
-              <a:t>Scan</a:t>
-            </a:r>
-            <a:r>
-              <a:rPr sz="2550" spc="40" dirty="0">
+              <a:t> je da efikasnost indeksa nije samo pitanje njihovog postojanja, već kombinacije više faktora: dizajna indeksa (koje kolone pokriva), ažurnosti Visibility Map (VACUUM), tačnosti statistika (ANALYZE), selektivnosti upita i konfiguracije memorijskih parametara</a:t>
+            </a:r>
+            <a:r>
+              <a:rPr lang="en-US" sz="3200" dirty="0">
                 <a:solidFill>
                   <a:srgbClr val="333333"/>
                 </a:solidFill>
                 <a:latin typeface="Calibri"/>
                 <a:cs typeface="Calibri"/>
               </a:rPr>
-              <a:t> </a:t>
-            </a:r>
-            <a:r>
-              <a:rPr sz="2550" dirty="0">
-                <a:solidFill>
-                  <a:srgbClr val="2F2F2F"/>
-                </a:solidFill>
-                <a:latin typeface="Calibri"/>
-                <a:cs typeface="Calibri"/>
-              </a:rPr>
-              <a:t>zahteva</a:t>
-            </a:r>
-            <a:r>
-              <a:rPr sz="2550" spc="105" dirty="0">
-                <a:solidFill>
-                  <a:srgbClr val="2F2F2F"/>
-                </a:solidFill>
-                <a:latin typeface="Calibri"/>
-                <a:cs typeface="Calibri"/>
-              </a:rPr>
-              <a:t> </a:t>
-            </a:r>
-            <a:r>
-              <a:rPr sz="2550" spc="-10" dirty="0">
-                <a:solidFill>
-                  <a:srgbClr val="333333"/>
-                </a:solidFill>
-                <a:latin typeface="Calibri"/>
-                <a:cs typeface="Calibri"/>
-              </a:rPr>
-              <a:t>ažurnu</a:t>
-            </a:r>
-            <a:endParaRPr sz="2550" dirty="0">
+              <a:t>.</a:t>
+            </a:r>
+          </a:p>
+          <a:p>
+            <a:pPr marR="1905" algn="ctr">
+              <a:lnSpc>
+                <a:spcPts val="3045"/>
+              </a:lnSpc>
+            </a:pPr>
+            <a:endParaRPr lang="en-US" sz="3200" dirty="0">
+              <a:solidFill>
+                <a:srgbClr val="333333"/>
+              </a:solidFill>
               <a:latin typeface="Calibri"/>
               <a:cs typeface="Calibri"/>
             </a:endParaRPr>
           </a:p>
           <a:p>
-            <a:pPr marL="12700" marR="5080" algn="ctr">
+            <a:pPr marR="1905" algn="ctr">
               <a:lnSpc>
-                <a:spcPct val="107100"/>
+                <a:spcPts val="3045"/>
               </a:lnSpc>
-              <a:spcBef>
-                <a:spcPts val="60"/>
-              </a:spcBef>
             </a:pPr>
             <a:r>
-              <a:rPr sz="2550" dirty="0">
-                <a:solidFill>
-                  <a:srgbClr val="363636"/>
-                </a:solidFill>
-                <a:latin typeface="Calibri"/>
-                <a:cs typeface="Calibri"/>
-              </a:rPr>
-              <a:t>Visibility</a:t>
-            </a:r>
-            <a:r>
-              <a:rPr sz="2550" spc="105" dirty="0">
-                <a:solidFill>
-                  <a:srgbClr val="363636"/>
-                </a:solidFill>
-                <a:latin typeface="Calibri"/>
-                <a:cs typeface="Calibri"/>
-              </a:rPr>
-              <a:t> </a:t>
-            </a:r>
-            <a:r>
-              <a:rPr sz="2550" spc="-70" dirty="0">
-                <a:solidFill>
-                  <a:srgbClr val="343434"/>
-                </a:solidFill>
-                <a:latin typeface="Calibri"/>
-                <a:cs typeface="Calibri"/>
-              </a:rPr>
-              <a:t>Map. </a:t>
-            </a:r>
-            <a:r>
-              <a:rPr sz="2550" dirty="0">
-                <a:solidFill>
-                  <a:srgbClr val="333333"/>
-                </a:solidFill>
-                <a:latin typeface="Calibri"/>
-                <a:cs typeface="Calibri"/>
-              </a:rPr>
-              <a:t>Redovan</a:t>
-            </a:r>
-            <a:r>
-              <a:rPr sz="2550" spc="75" dirty="0">
-                <a:solidFill>
-                  <a:srgbClr val="333333"/>
-                </a:solidFill>
-                <a:latin typeface="Calibri"/>
-                <a:cs typeface="Calibri"/>
-              </a:rPr>
-              <a:t> </a:t>
-            </a:r>
-            <a:r>
-              <a:rPr sz="2550" spc="60" dirty="0">
-                <a:solidFill>
-                  <a:srgbClr val="383838"/>
-                </a:solidFill>
-                <a:latin typeface="Calibri"/>
-                <a:cs typeface="Calibri"/>
-              </a:rPr>
-              <a:t>VACUUM</a:t>
-            </a:r>
-            <a:r>
-              <a:rPr sz="2550" spc="105" dirty="0">
-                <a:solidFill>
-                  <a:srgbClr val="383838"/>
-                </a:solidFill>
-                <a:latin typeface="Calibri"/>
-                <a:cs typeface="Calibri"/>
-              </a:rPr>
-              <a:t> </a:t>
-            </a:r>
-            <a:r>
-              <a:rPr sz="2550" spc="-25" dirty="0">
-                <a:solidFill>
-                  <a:srgbClr val="333333"/>
-                </a:solidFill>
-                <a:latin typeface="Calibri"/>
-                <a:cs typeface="Calibri"/>
-              </a:rPr>
-              <a:t>je </a:t>
-            </a:r>
-            <a:r>
-              <a:rPr sz="2550" dirty="0">
-                <a:solidFill>
-                  <a:srgbClr val="262626"/>
-                </a:solidFill>
-                <a:latin typeface="Calibri"/>
-                <a:cs typeface="Calibri"/>
-              </a:rPr>
-              <a:t>kritičan</a:t>
-            </a:r>
-            <a:r>
-              <a:rPr sz="2550" spc="135" dirty="0">
-                <a:solidFill>
-                  <a:srgbClr val="262626"/>
-                </a:solidFill>
-                <a:latin typeface="Calibri"/>
-                <a:cs typeface="Calibri"/>
-              </a:rPr>
-              <a:t> </a:t>
-            </a:r>
-            <a:r>
-              <a:rPr sz="2550" spc="65" dirty="0">
-                <a:solidFill>
-                  <a:srgbClr val="2F2F2F"/>
-                </a:solidFill>
-                <a:latin typeface="Calibri"/>
-                <a:cs typeface="Calibri"/>
-              </a:rPr>
-              <a:t>za</a:t>
-            </a:r>
-            <a:r>
-              <a:rPr sz="2550" spc="-45" dirty="0">
-                <a:solidFill>
-                  <a:srgbClr val="2F2F2F"/>
-                </a:solidFill>
-                <a:latin typeface="Calibri"/>
-                <a:cs typeface="Calibri"/>
-              </a:rPr>
-              <a:t> </a:t>
-            </a:r>
-            <a:r>
-              <a:rPr sz="2550" dirty="0">
-                <a:solidFill>
-                  <a:srgbClr val="343434"/>
-                </a:solidFill>
-                <a:latin typeface="Calibri"/>
-                <a:cs typeface="Calibri"/>
-              </a:rPr>
-              <a:t>održavanje</a:t>
-            </a:r>
-            <a:r>
-              <a:rPr sz="2550" spc="240" dirty="0">
-                <a:solidFill>
-                  <a:srgbClr val="343434"/>
-                </a:solidFill>
-                <a:latin typeface="Calibri"/>
-                <a:cs typeface="Calibri"/>
-              </a:rPr>
-              <a:t> </a:t>
-            </a:r>
-            <a:r>
-              <a:rPr sz="2550" spc="-40" dirty="0">
-                <a:solidFill>
-                  <a:srgbClr val="383838"/>
-                </a:solidFill>
-                <a:latin typeface="Calibri"/>
-                <a:cs typeface="Calibri"/>
-              </a:rPr>
-              <a:t>"all-</a:t>
-            </a:r>
-            <a:r>
-              <a:rPr sz="2550" spc="-10" dirty="0">
-                <a:solidFill>
-                  <a:srgbClr val="383838"/>
-                </a:solidFill>
-                <a:latin typeface="Calibri"/>
-                <a:cs typeface="Calibri"/>
-              </a:rPr>
-              <a:t>visible" </a:t>
-            </a:r>
-            <a:r>
-              <a:rPr sz="2550" dirty="0">
-                <a:solidFill>
-                  <a:srgbClr val="333333"/>
-                </a:solidFill>
-                <a:latin typeface="Calibri"/>
-                <a:cs typeface="Calibri"/>
-              </a:rPr>
-              <a:t>bitova</a:t>
-            </a:r>
-            <a:r>
-              <a:rPr sz="2550" spc="-50" dirty="0">
-                <a:solidFill>
-                  <a:srgbClr val="333333"/>
-                </a:solidFill>
-                <a:latin typeface="Calibri"/>
-                <a:cs typeface="Calibri"/>
-              </a:rPr>
-              <a:t> </a:t>
-            </a:r>
-            <a:r>
-              <a:rPr sz="2550" dirty="0">
-                <a:solidFill>
-                  <a:srgbClr val="343434"/>
-                </a:solidFill>
-                <a:latin typeface="Calibri"/>
-                <a:cs typeface="Calibri"/>
-              </a:rPr>
-              <a:t>na</a:t>
-            </a:r>
-            <a:r>
-              <a:rPr sz="2550" spc="-95" dirty="0">
-                <a:solidFill>
-                  <a:srgbClr val="343434"/>
-                </a:solidFill>
-                <a:latin typeface="Calibri"/>
-                <a:cs typeface="Calibri"/>
-              </a:rPr>
-              <a:t> </a:t>
-            </a:r>
-            <a:r>
-              <a:rPr sz="2550" dirty="0">
-                <a:solidFill>
-                  <a:srgbClr val="2F2F2F"/>
-                </a:solidFill>
-                <a:latin typeface="Calibri"/>
-                <a:cs typeface="Calibri"/>
-              </a:rPr>
-              <a:t>stranicama</a:t>
-            </a:r>
-            <a:r>
-              <a:rPr sz="2550" spc="105" dirty="0">
-                <a:solidFill>
-                  <a:srgbClr val="2F2F2F"/>
-                </a:solidFill>
-                <a:latin typeface="Calibri"/>
-                <a:cs typeface="Calibri"/>
-              </a:rPr>
-              <a:t> </a:t>
-            </a:r>
-            <a:r>
-              <a:rPr sz="2550" spc="-10" dirty="0">
-                <a:solidFill>
-                  <a:srgbClr val="333333"/>
-                </a:solidFill>
-                <a:latin typeface="Calibri"/>
-                <a:cs typeface="Calibri"/>
-              </a:rPr>
-              <a:t>tabele.</a:t>
-            </a:r>
-            <a:endParaRPr sz="2550" dirty="0">
-              <a:latin typeface="Calibri"/>
-              <a:cs typeface="Calibri"/>
-            </a:endParaRPr>
-          </a:p>
-        </p:txBody>
-      </p:sp>
-      <p:sp>
-        <p:nvSpPr>
-          <p:cNvPr id="8" name="object 8"/>
-          <p:cNvSpPr txBox="1"/>
-          <p:nvPr/>
-        </p:nvSpPr>
-        <p:spPr>
-          <a:xfrm>
-            <a:off x="11023617" y="5180858"/>
-            <a:ext cx="4502150" cy="2475865"/>
-          </a:xfrm>
-          <a:prstGeom prst="rect">
-            <a:avLst/>
-          </a:prstGeom>
-        </p:spPr>
-        <p:txBody>
-          <a:bodyPr vert="horz" wrap="square" lIns="0" tIns="15875" rIns="0" bIns="0" rtlCol="0">
-            <a:spAutoFit/>
-          </a:bodyPr>
-          <a:lstStyle/>
-          <a:p>
-            <a:pPr marL="1270" algn="ctr">
-              <a:lnSpc>
-                <a:spcPct val="100000"/>
-              </a:lnSpc>
-              <a:spcBef>
-                <a:spcPts val="125"/>
-              </a:spcBef>
-            </a:pPr>
-            <a:r>
-              <a:rPr sz="2550" dirty="0">
-                <a:solidFill>
-                  <a:srgbClr val="005090"/>
-                </a:solidFill>
-                <a:latin typeface="Cambria"/>
-                <a:cs typeface="Cambria"/>
-              </a:rPr>
-              <a:t>CBO</a:t>
-            </a:r>
-            <a:r>
-              <a:rPr sz="2550" spc="30" dirty="0">
-                <a:solidFill>
-                  <a:srgbClr val="005090"/>
-                </a:solidFill>
-                <a:latin typeface="Cambria"/>
-                <a:cs typeface="Cambria"/>
-              </a:rPr>
-              <a:t> </a:t>
-            </a:r>
-            <a:r>
-              <a:rPr sz="2550" spc="80" dirty="0">
-                <a:solidFill>
-                  <a:srgbClr val="01568E"/>
-                </a:solidFill>
-                <a:latin typeface="Cambria"/>
-                <a:cs typeface="Cambria"/>
-              </a:rPr>
-              <a:t>Logika</a:t>
-            </a:r>
-            <a:endParaRPr sz="2550">
-              <a:latin typeface="Cambria"/>
-              <a:cs typeface="Cambria"/>
-            </a:endParaRPr>
-          </a:p>
-          <a:p>
-            <a:pPr marL="24765" algn="ctr">
-              <a:lnSpc>
-                <a:spcPct val="100000"/>
-              </a:lnSpc>
-              <a:spcBef>
-                <a:spcPts val="30"/>
-              </a:spcBef>
-            </a:pPr>
-            <a:r>
-              <a:rPr sz="2550" dirty="0">
-                <a:solidFill>
-                  <a:srgbClr val="383838"/>
-                </a:solidFill>
-                <a:latin typeface="Calibri"/>
-                <a:cs typeface="Calibri"/>
-              </a:rPr>
-              <a:t>Indeks</a:t>
-            </a:r>
-            <a:r>
-              <a:rPr sz="2550" spc="-60" dirty="0">
-                <a:solidFill>
-                  <a:srgbClr val="383838"/>
-                </a:solidFill>
-                <a:latin typeface="Calibri"/>
-                <a:cs typeface="Calibri"/>
-              </a:rPr>
-              <a:t> </a:t>
-            </a:r>
-            <a:r>
-              <a:rPr sz="2550" dirty="0">
-                <a:solidFill>
-                  <a:srgbClr val="3B3B3B"/>
-                </a:solidFill>
-                <a:latin typeface="Calibri"/>
-                <a:cs typeface="Calibri"/>
-              </a:rPr>
-              <a:t>ne</a:t>
-            </a:r>
-            <a:r>
-              <a:rPr sz="2550" spc="-130" dirty="0">
-                <a:solidFill>
-                  <a:srgbClr val="3B3B3B"/>
-                </a:solidFill>
-                <a:latin typeface="Calibri"/>
-                <a:cs typeface="Calibri"/>
-              </a:rPr>
-              <a:t> </a:t>
-            </a:r>
-            <a:r>
-              <a:rPr sz="2550" dirty="0">
-                <a:solidFill>
-                  <a:srgbClr val="333333"/>
-                </a:solidFill>
-                <a:latin typeface="Calibri"/>
-                <a:cs typeface="Calibri"/>
-              </a:rPr>
-              <a:t>garantuje</a:t>
-            </a:r>
-            <a:r>
-              <a:rPr sz="2550" spc="10" dirty="0">
-                <a:solidFill>
-                  <a:srgbClr val="333333"/>
-                </a:solidFill>
-                <a:latin typeface="Calibri"/>
-                <a:cs typeface="Calibri"/>
-              </a:rPr>
-              <a:t> </a:t>
-            </a:r>
-            <a:r>
-              <a:rPr sz="2550" dirty="0">
-                <a:solidFill>
-                  <a:srgbClr val="3B3B3B"/>
-                </a:solidFill>
-                <a:latin typeface="Calibri"/>
-                <a:cs typeface="Calibri"/>
-              </a:rPr>
-              <a:t>Index</a:t>
-            </a:r>
-            <a:r>
-              <a:rPr sz="2550" spc="45" dirty="0">
-                <a:solidFill>
-                  <a:srgbClr val="3B3B3B"/>
-                </a:solidFill>
-                <a:latin typeface="Calibri"/>
-                <a:cs typeface="Calibri"/>
-              </a:rPr>
-              <a:t> </a:t>
-            </a:r>
-            <a:r>
-              <a:rPr sz="2550" spc="-10" dirty="0">
-                <a:solidFill>
-                  <a:srgbClr val="2A2A2A"/>
-                </a:solidFill>
-                <a:latin typeface="Calibri"/>
-                <a:cs typeface="Calibri"/>
-              </a:rPr>
-              <a:t>Scan.</a:t>
-            </a:r>
-            <a:endParaRPr sz="2550">
-              <a:latin typeface="Calibri"/>
-              <a:cs typeface="Calibri"/>
-            </a:endParaRPr>
-          </a:p>
-          <a:p>
-            <a:pPr marL="12065" marR="5080" indent="5080" algn="ctr">
-              <a:lnSpc>
-                <a:spcPct val="106400"/>
-              </a:lnSpc>
-              <a:spcBef>
-                <a:spcPts val="85"/>
-              </a:spcBef>
-            </a:pPr>
-            <a:r>
-              <a:rPr sz="2550" dirty="0">
-                <a:solidFill>
-                  <a:srgbClr val="333333"/>
-                </a:solidFill>
-                <a:latin typeface="Calibri"/>
-                <a:cs typeface="Calibri"/>
-              </a:rPr>
-              <a:t>PostgreSQL</a:t>
-            </a:r>
-            <a:r>
-              <a:rPr sz="2550" spc="200" dirty="0">
-                <a:solidFill>
-                  <a:srgbClr val="333333"/>
-                </a:solidFill>
-                <a:latin typeface="Calibri"/>
-                <a:cs typeface="Calibri"/>
-              </a:rPr>
-              <a:t> </a:t>
-            </a:r>
-            <a:r>
-              <a:rPr sz="2550" dirty="0">
-                <a:solidFill>
-                  <a:srgbClr val="2D2D2D"/>
-                </a:solidFill>
-                <a:latin typeface="Calibri"/>
-                <a:cs typeface="Calibri"/>
-              </a:rPr>
-              <a:t>inteligentno</a:t>
-            </a:r>
-            <a:r>
-              <a:rPr sz="2550" spc="260" dirty="0">
-                <a:solidFill>
-                  <a:srgbClr val="2D2D2D"/>
-                </a:solidFill>
-                <a:latin typeface="Calibri"/>
-                <a:cs typeface="Calibri"/>
-              </a:rPr>
-              <a:t> </a:t>
-            </a:r>
-            <a:r>
-              <a:rPr sz="2550" spc="-20" dirty="0">
-                <a:solidFill>
-                  <a:srgbClr val="414141"/>
-                </a:solidFill>
-                <a:latin typeface="Calibri"/>
-                <a:cs typeface="Calibri"/>
-              </a:rPr>
-              <a:t>bira </a:t>
-            </a:r>
-            <a:r>
-              <a:rPr sz="2550" dirty="0">
-                <a:solidFill>
-                  <a:srgbClr val="343434"/>
-                </a:solidFill>
-                <a:latin typeface="Calibri"/>
-                <a:cs typeface="Calibri"/>
-              </a:rPr>
-              <a:t>Bitmap</a:t>
-            </a:r>
-            <a:r>
-              <a:rPr sz="2550" spc="-40" dirty="0">
-                <a:solidFill>
-                  <a:srgbClr val="343434"/>
-                </a:solidFill>
-                <a:latin typeface="Calibri"/>
-                <a:cs typeface="Calibri"/>
-              </a:rPr>
-              <a:t> </a:t>
-            </a:r>
-            <a:r>
-              <a:rPr sz="2550" dirty="0">
-                <a:solidFill>
-                  <a:srgbClr val="333333"/>
-                </a:solidFill>
-                <a:latin typeface="Calibri"/>
-                <a:cs typeface="Calibri"/>
-              </a:rPr>
-              <a:t>Scan</a:t>
-            </a:r>
-            <a:r>
-              <a:rPr sz="2550" spc="-5" dirty="0">
-                <a:solidFill>
-                  <a:srgbClr val="333333"/>
-                </a:solidFill>
-                <a:latin typeface="Calibri"/>
-                <a:cs typeface="Calibri"/>
-              </a:rPr>
-              <a:t> </a:t>
-            </a:r>
-            <a:r>
-              <a:rPr sz="2550" dirty="0">
-                <a:solidFill>
-                  <a:srgbClr val="363636"/>
-                </a:solidFill>
-                <a:latin typeface="Calibri"/>
-                <a:cs typeface="Calibri"/>
-              </a:rPr>
-              <a:t>kada</a:t>
-            </a:r>
-            <a:r>
-              <a:rPr sz="2550" spc="-25" dirty="0">
-                <a:solidFill>
-                  <a:srgbClr val="363636"/>
-                </a:solidFill>
-                <a:latin typeface="Calibri"/>
-                <a:cs typeface="Calibri"/>
-              </a:rPr>
-              <a:t> </a:t>
-            </a:r>
-            <a:r>
-              <a:rPr sz="2550" dirty="0">
-                <a:solidFill>
-                  <a:srgbClr val="383838"/>
-                </a:solidFill>
-                <a:latin typeface="Calibri"/>
-                <a:cs typeface="Calibri"/>
-              </a:rPr>
-              <a:t>je</a:t>
-            </a:r>
-            <a:r>
-              <a:rPr sz="2550" spc="-95" dirty="0">
-                <a:solidFill>
-                  <a:srgbClr val="383838"/>
-                </a:solidFill>
-                <a:latin typeface="Calibri"/>
-                <a:cs typeface="Calibri"/>
-              </a:rPr>
-              <a:t> </a:t>
-            </a:r>
-            <a:r>
-              <a:rPr sz="2550" spc="-10" dirty="0">
-                <a:solidFill>
-                  <a:srgbClr val="282828"/>
-                </a:solidFill>
-                <a:latin typeface="Calibri"/>
-                <a:cs typeface="Calibri"/>
-              </a:rPr>
-              <a:t>selektivnost </a:t>
-            </a:r>
-            <a:r>
-              <a:rPr sz="2550" dirty="0">
-                <a:solidFill>
-                  <a:srgbClr val="343434"/>
-                </a:solidFill>
-                <a:latin typeface="Calibri"/>
-                <a:cs typeface="Calibri"/>
-              </a:rPr>
-              <a:t>umerena</a:t>
-            </a:r>
-            <a:r>
-              <a:rPr sz="2550" spc="-55" dirty="0">
-                <a:solidFill>
-                  <a:srgbClr val="343434"/>
-                </a:solidFill>
-                <a:latin typeface="Calibri"/>
-                <a:cs typeface="Calibri"/>
-              </a:rPr>
-              <a:t> </a:t>
-            </a:r>
-            <a:r>
-              <a:rPr sz="2550" dirty="0">
-                <a:solidFill>
-                  <a:srgbClr val="333333"/>
-                </a:solidFill>
-                <a:latin typeface="Calibri"/>
-                <a:cs typeface="Calibri"/>
-              </a:rPr>
-              <a:t>(oko</a:t>
-            </a:r>
-            <a:r>
-              <a:rPr sz="2550" spc="-80" dirty="0">
-                <a:solidFill>
-                  <a:srgbClr val="333333"/>
-                </a:solidFill>
-                <a:latin typeface="Calibri"/>
-                <a:cs typeface="Calibri"/>
-              </a:rPr>
-              <a:t> </a:t>
-            </a:r>
-            <a:r>
-              <a:rPr sz="2550" dirty="0">
-                <a:solidFill>
-                  <a:srgbClr val="343434"/>
-                </a:solidFill>
-                <a:latin typeface="Calibri"/>
-                <a:cs typeface="Calibri"/>
-              </a:rPr>
-              <a:t>10%</a:t>
-            </a:r>
-            <a:r>
-              <a:rPr sz="2550" spc="-110" dirty="0">
-                <a:solidFill>
-                  <a:srgbClr val="343434"/>
-                </a:solidFill>
-                <a:latin typeface="Calibri"/>
-                <a:cs typeface="Calibri"/>
-              </a:rPr>
-              <a:t> </a:t>
-            </a:r>
-            <a:r>
-              <a:rPr sz="2550" spc="-20" dirty="0">
-                <a:solidFill>
-                  <a:srgbClr val="383838"/>
-                </a:solidFill>
-                <a:latin typeface="Calibri"/>
-                <a:cs typeface="Calibri"/>
-              </a:rPr>
-              <a:t>tabele)</a:t>
-            </a:r>
-            <a:r>
-              <a:rPr sz="2550" spc="-25" dirty="0">
-                <a:solidFill>
-                  <a:srgbClr val="383838"/>
-                </a:solidFill>
-                <a:latin typeface="Calibri"/>
-                <a:cs typeface="Calibri"/>
-              </a:rPr>
-              <a:t> </a:t>
-            </a:r>
-            <a:r>
-              <a:rPr sz="2550" dirty="0">
-                <a:solidFill>
-                  <a:srgbClr val="333333"/>
-                </a:solidFill>
-                <a:latin typeface="Calibri"/>
-                <a:cs typeface="Calibri"/>
-              </a:rPr>
-              <a:t>kako</a:t>
-            </a:r>
-            <a:r>
-              <a:rPr sz="2550" spc="-75" dirty="0">
-                <a:solidFill>
-                  <a:srgbClr val="333333"/>
-                </a:solidFill>
-                <a:latin typeface="Calibri"/>
-                <a:cs typeface="Calibri"/>
-              </a:rPr>
-              <a:t> </a:t>
-            </a:r>
-            <a:r>
-              <a:rPr sz="2550" spc="-25" dirty="0">
-                <a:solidFill>
-                  <a:srgbClr val="3B3B3B"/>
-                </a:solidFill>
-                <a:latin typeface="Calibri"/>
-                <a:cs typeface="Calibri"/>
-              </a:rPr>
-              <a:t>bi </a:t>
-            </a:r>
-            <a:r>
-              <a:rPr sz="2550" dirty="0">
-                <a:solidFill>
-                  <a:srgbClr val="333333"/>
-                </a:solidFill>
-                <a:latin typeface="Calibri"/>
-                <a:cs typeface="Calibri"/>
-              </a:rPr>
-              <a:t>izbegao</a:t>
-            </a:r>
-            <a:r>
-              <a:rPr sz="2550" spc="-25" dirty="0">
-                <a:solidFill>
-                  <a:srgbClr val="333333"/>
-                </a:solidFill>
-                <a:latin typeface="Calibri"/>
-                <a:cs typeface="Calibri"/>
-              </a:rPr>
-              <a:t> </a:t>
-            </a:r>
-            <a:r>
-              <a:rPr sz="2550" dirty="0">
-                <a:solidFill>
-                  <a:srgbClr val="363636"/>
-                </a:solidFill>
-                <a:latin typeface="Calibri"/>
-                <a:cs typeface="Calibri"/>
-              </a:rPr>
-              <a:t>random</a:t>
-            </a:r>
-            <a:r>
-              <a:rPr sz="2550" spc="-40" dirty="0">
-                <a:solidFill>
-                  <a:srgbClr val="363636"/>
-                </a:solidFill>
-                <a:latin typeface="Calibri"/>
-                <a:cs typeface="Calibri"/>
-              </a:rPr>
-              <a:t> </a:t>
-            </a:r>
-            <a:r>
-              <a:rPr sz="2550" spc="-10" dirty="0">
-                <a:solidFill>
-                  <a:srgbClr val="2F2F2F"/>
-                </a:solidFill>
-                <a:latin typeface="Calibri"/>
-                <a:cs typeface="Calibri"/>
-              </a:rPr>
-              <a:t>skokove.</a:t>
-            </a:r>
-            <a:endParaRPr sz="2550">
+              <a:rPr lang="sr-Latn-RS" sz="3200" dirty="0">
+                <a:solidFill>
+                  <a:schemeClr val="tx1">
+                    <a:lumMod val="75000"/>
+                    <a:lumOff val="25000"/>
+                  </a:schemeClr>
+                </a:solidFill>
+                <a:latin typeface="Calibri"/>
+                <a:cs typeface="Calibri"/>
+              </a:rPr>
+              <a:t>Razumevanje ovih međuzavisnosti omogućava inženjeru baze podataka da projektuje sistem koji koristi puni potencijal PostgreSQL optimizatora.</a:t>
+            </a:r>
+            <a:endParaRPr sz="3200" dirty="0">
+              <a:solidFill>
+                <a:schemeClr val="tx1">
+                  <a:lumMod val="75000"/>
+                  <a:lumOff val="25000"/>
+                </a:schemeClr>
+              </a:solidFill>
               <a:latin typeface="Calibri"/>
               <a:cs typeface="Calibri"/>
             </a:endParaRPr>
@@ -9838,7 +9083,7 @@
               </a:spcBef>
             </a:pPr>
             <a:r>
-              <a:rPr lang="sr-Latn-RS" sz="9500" spc="-30" dirty="0">
+              <a:rPr lang="sr-Latn-RS" sz="9500" b="1" spc="-30" dirty="0">
                 <a:solidFill>
                   <a:srgbClr val="00508E"/>
                 </a:solidFill>
@@ -9858,8 +9103,8 @@
         </p:nvSpPr>
         <p:spPr>
           <a:xfrm>
-            <a:off x="8087200" y="9388475"/>
-            <a:ext cx="3929698" cy="419410"/>
+            <a:off x="7469424" y="9312275"/>
+            <a:ext cx="5165250" cy="523157"/>
           </a:xfrm>
           <a:prstGeom prst="rect">
             <a:avLst/>
@@ -9880,7 +9125,7 @@
               </a:spcBef>
             </a:pPr>
             <a:r>
-              <a:rPr sz="2550" dirty="0">
+              <a:rPr sz="3200" dirty="0">
                 <a:solidFill>
                   <a:srgbClr val="2A2A2A"/>
                 </a:solidFill>
@@ -9890,7 +9135,7 @@
               <a:t>Nemanja</a:t>
             </a:r>
             <a:r>
-              <a:rPr sz="2550" spc="-65" dirty="0">
+              <a:rPr sz="3200" spc="-65" dirty="0">
                 <a:solidFill>
                   <a:srgbClr val="2A2A2A"/>
                 </a:solidFill>
@@ -9900,7 +9145,7 @@
               <a:t> </a:t>
             </a:r>
             <a:r>
-              <a:rPr sz="2550" dirty="0" err="1">
+              <a:rPr sz="3200" dirty="0" err="1">
                 <a:solidFill>
                   <a:srgbClr val="313131"/>
                 </a:solidFill>
@@ -9910,7 +9155,7 @@
               <a:t>Stojadinović</a:t>
             </a:r>
             <a:r>
-              <a:rPr sz="2550" dirty="0">
+              <a:rPr sz="3200" dirty="0">
                 <a:solidFill>
                   <a:srgbClr val="313131"/>
                 </a:solidFill>
@@ -9920,7 +9165,7 @@
               <a:t>,</a:t>
             </a:r>
             <a:r>
-              <a:rPr lang="en-US" sz="2550" spc="-100" dirty="0">
+              <a:rPr lang="en-US" sz="3200" spc="-100" dirty="0">
                 <a:solidFill>
                   <a:srgbClr val="313131"/>
                 </a:solidFill>
@@ -9930,7 +9175,7 @@
               <a:t> </a:t>
             </a:r>
             <a:r>
-              <a:rPr sz="2550" spc="35" dirty="0">
+              <a:rPr sz="3200" spc="35" dirty="0">
                 <a:solidFill>
                   <a:srgbClr val="232323"/>
                 </a:solidFill>
@@ -9940,7 +9185,7 @@
               <a:t>2094</a:t>
             </a:r>
             <a:r>
-              <a:rPr sz="2550" spc="-10" dirty="0">
+              <a:rPr sz="3200" spc="-10" dirty="0">
                 <a:solidFill>
                   <a:srgbClr val="5E5E5E"/>
                 </a:solidFill>
@@ -9949,7 +9194,7 @@
               </a:rPr>
               <a:t>.</a:t>
             </a:r>
-            <a:endParaRPr sz="2550" dirty="0">
+            <a:endParaRPr sz="3200" dirty="0">
               <a:latin typeface="Calibri"/>
               <a:cs typeface="Calibri"/>
             </a:endParaRPr>
@@ -16034,7 +15279,10 @@
             <a:r>
               <a:rPr sz="2550" spc="160" dirty="0">
                 <a:solidFill>
-                  <a:srgbClr val="3B3B3B"/>
+                  <a:schemeClr val="tx1">
+                    <a:lumMod val="75000"/>
+                    <a:lumOff val="25000"/>
+                  </a:schemeClr>
                 </a:solidFill>
                 <a:latin typeface="Calibri"/>
                 <a:cs typeface="Calibri"/>
@@ -16044,7 +15292,10 @@
             <a:r>
               <a:rPr sz="2550" spc="-145" dirty="0">
                 <a:solidFill>
-                  <a:srgbClr val="3B3B3B"/>
+                  <a:schemeClr val="tx1">
+                    <a:lumMod val="75000"/>
+                    <a:lumOff val="25000"/>
+                  </a:schemeClr>
                 </a:solidFill>
                 <a:latin typeface="Calibri"/>
                 <a:cs typeface="Calibri"/>
@@ -16054,7 +15305,10 @@
             <a:r>
               <a:rPr sz="2550" dirty="0">
                 <a:solidFill>
-                  <a:srgbClr val="282828"/>
+                  <a:schemeClr val="tx1">
+                    <a:lumMod val="75000"/>
+                    <a:lumOff val="25000"/>
+                  </a:schemeClr>
                 </a:solidFill>
                 <a:latin typeface="Calibri"/>
                 <a:cs typeface="Calibri"/>
@@ -16064,7 +15318,10 @@
             <a:r>
               <a:rPr sz="2550" spc="220" dirty="0">
                 <a:solidFill>
-                  <a:srgbClr val="282828"/>
+                  <a:schemeClr val="tx1">
+                    <a:lumMod val="75000"/>
+                    <a:lumOff val="25000"/>
+                  </a:schemeClr>
                 </a:solidFill>
                 <a:latin typeface="Calibri"/>
                 <a:cs typeface="Calibri"/>
@@ -16074,7 +15331,10 @@
             <a:r>
               <a:rPr sz="2550" dirty="0">
                 <a:solidFill>
-                  <a:srgbClr val="383838"/>
+                  <a:schemeClr val="tx1">
+                    <a:lumMod val="75000"/>
+                    <a:lumOff val="25000"/>
+                  </a:schemeClr>
                 </a:solidFill>
                 <a:latin typeface="Calibri"/>
                 <a:cs typeface="Calibri"/>
@@ -16084,7 +15344,10 @@
             <a:r>
               <a:rPr sz="2550" spc="65" dirty="0">
                 <a:solidFill>
-                  <a:srgbClr val="383838"/>
+                  <a:schemeClr val="tx1">
+                    <a:lumMod val="75000"/>
+                    <a:lumOff val="25000"/>
+                  </a:schemeClr>
                 </a:solidFill>
                 <a:latin typeface="Calibri"/>
                 <a:cs typeface="Calibri"/>
@@ -16094,7 +15357,10 @@
             <a:r>
               <a:rPr sz="2550" dirty="0">
                 <a:solidFill>
-                  <a:srgbClr val="2A2A2A"/>
+                  <a:schemeClr val="tx1">
+                    <a:lumMod val="75000"/>
+                    <a:lumOff val="25000"/>
+                  </a:schemeClr>
                 </a:solidFill>
                 <a:latin typeface="Calibri"/>
                 <a:cs typeface="Calibri"/>
@@ -16104,7 +15370,10 @@
             <a:r>
               <a:rPr sz="2550" spc="-75" dirty="0">
                 <a:solidFill>
-                  <a:srgbClr val="2A2A2A"/>
+                  <a:schemeClr val="tx1">
+                    <a:lumMod val="75000"/>
+                    <a:lumOff val="25000"/>
+                  </a:schemeClr>
                 </a:solidFill>
                 <a:latin typeface="Calibri"/>
                 <a:cs typeface="Calibri"/>
@@ -16114,7 +15383,10 @@
             <a:r>
               <a:rPr sz="2550" dirty="0">
                 <a:solidFill>
-                  <a:srgbClr val="333333"/>
+                  <a:schemeClr val="tx1">
+                    <a:lumMod val="75000"/>
+                    <a:lumOff val="25000"/>
+                  </a:schemeClr>
                 </a:solidFill>
                 <a:latin typeface="Calibri"/>
                 <a:cs typeface="Calibri"/>
@@ -16124,7 +15396,10 @@
             <a:r>
               <a:rPr sz="2550" spc="-25" dirty="0">
                 <a:solidFill>
-                  <a:srgbClr val="333333"/>
+                  <a:schemeClr val="tx1">
+                    <a:lumMod val="75000"/>
+                    <a:lumOff val="25000"/>
+                  </a:schemeClr>
                 </a:solidFill>
                 <a:latin typeface="Calibri"/>
                 <a:cs typeface="Calibri"/>
@@ -16134,7 +15409,10 @@
             <a:r>
               <a:rPr sz="2550" spc="50" dirty="0">
                 <a:solidFill>
-                  <a:srgbClr val="363636"/>
+                  <a:schemeClr val="tx1">
+                    <a:lumMod val="75000"/>
+                    <a:lumOff val="25000"/>
+                  </a:schemeClr>
                 </a:solidFill>
                 <a:latin typeface="Calibri"/>
                 <a:cs typeface="Calibri"/>
@@ -16144,7 +15422,10 @@
             <a:r>
               <a:rPr sz="2550" spc="-95" dirty="0">
                 <a:solidFill>
-                  <a:srgbClr val="363636"/>
+                  <a:schemeClr val="tx1">
+                    <a:lumMod val="75000"/>
+                    <a:lumOff val="25000"/>
+                  </a:schemeClr>
                 </a:solidFill>
                 <a:latin typeface="Calibri"/>
                 <a:cs typeface="Calibri"/>
@@ -16154,7 +15435,10 @@
             <a:r>
               <a:rPr sz="2550" spc="65" dirty="0">
                 <a:solidFill>
-                  <a:srgbClr val="343434"/>
+                  <a:schemeClr val="tx1">
+                    <a:lumMod val="75000"/>
+                    <a:lumOff val="25000"/>
+                  </a:schemeClr>
                 </a:solidFill>
                 <a:latin typeface="Calibri"/>
                 <a:cs typeface="Calibri"/>
@@ -16164,7 +15448,10 @@
             <a:r>
               <a:rPr sz="2550" spc="95" dirty="0">
                 <a:solidFill>
-                  <a:srgbClr val="343434"/>
+                  <a:schemeClr val="tx1">
+                    <a:lumMod val="75000"/>
+                    <a:lumOff val="25000"/>
+                  </a:schemeClr>
                 </a:solidFill>
                 <a:latin typeface="Calibri"/>
                 <a:cs typeface="Calibri"/>
@@ -16174,7 +15461,10 @@
             <a:r>
               <a:rPr sz="2550" dirty="0">
                 <a:solidFill>
-                  <a:srgbClr val="333333"/>
+                  <a:schemeClr val="tx1">
+                    <a:lumMod val="75000"/>
+                    <a:lumOff val="25000"/>
+                  </a:schemeClr>
                 </a:solidFill>
                 <a:latin typeface="Calibri"/>
                 <a:cs typeface="Calibri"/>
@@ -16184,7 +15474,10 @@
             <a:r>
               <a:rPr sz="2550" spc="-15" dirty="0">
                 <a:solidFill>
-                  <a:srgbClr val="333333"/>
+                  <a:schemeClr val="tx1">
+                    <a:lumMod val="75000"/>
+                    <a:lumOff val="25000"/>
+                  </a:schemeClr>
                 </a:solidFill>
                 <a:latin typeface="Calibri"/>
                 <a:cs typeface="Calibri"/>
@@ -16194,7 +15487,10 @@
             <a:r>
               <a:rPr sz="2550" spc="-10" dirty="0">
                 <a:solidFill>
-                  <a:srgbClr val="2A2A2A"/>
+                  <a:schemeClr val="tx1">
+                    <a:lumMod val="75000"/>
+                    <a:lumOff val="25000"/>
+                  </a:schemeClr>
                 </a:solidFill>
                 <a:latin typeface="Calibri"/>
                 <a:cs typeface="Calibri"/>
@@ -16204,7 +15500,10 @@
             <a:r>
               <a:rPr sz="2550" dirty="0">
                 <a:solidFill>
-                  <a:srgbClr val="2F2F2F"/>
+                  <a:schemeClr val="tx1">
+                    <a:lumMod val="75000"/>
+                    <a:lumOff val="25000"/>
+                  </a:schemeClr>
                 </a:solidFill>
                 <a:latin typeface="Calibri"/>
                 <a:cs typeface="Calibri"/>
@@ -16214,7 +15513,10 @@
             <a:r>
               <a:rPr sz="2550" spc="-170" dirty="0">
                 <a:solidFill>
-                  <a:srgbClr val="2F2F2F"/>
+                  <a:schemeClr val="tx1">
+                    <a:lumMod val="75000"/>
+                    <a:lumOff val="25000"/>
+                  </a:schemeClr>
                 </a:solidFill>
                 <a:latin typeface="Calibri"/>
                 <a:cs typeface="Calibri"/>
@@ -16224,7 +15526,10 @@
             <a:r>
               <a:rPr sz="2550" dirty="0">
                 <a:solidFill>
-                  <a:srgbClr val="2F2F2F"/>
+                  <a:schemeClr val="tx1">
+                    <a:lumMod val="75000"/>
+                    <a:lumOff val="25000"/>
+                  </a:schemeClr>
                 </a:solidFill>
                 <a:latin typeface="Calibri"/>
                 <a:cs typeface="Calibri"/>
@@ -16234,7 +15539,10 @@
             <a:r>
               <a:rPr sz="2550" spc="10" dirty="0">
                 <a:solidFill>
-                  <a:srgbClr val="2F2F2F"/>
+                  <a:schemeClr val="tx1">
+                    <a:lumMod val="75000"/>
+                    <a:lumOff val="25000"/>
+                  </a:schemeClr>
                 </a:solidFill>
                 <a:latin typeface="Calibri"/>
                 <a:cs typeface="Calibri"/>
@@ -16244,7 +15552,10 @@
             <a:r>
               <a:rPr sz="2550" spc="55" dirty="0">
                 <a:solidFill>
-                  <a:srgbClr val="363636"/>
+                  <a:schemeClr val="tx1">
+                    <a:lumMod val="75000"/>
+                    <a:lumOff val="25000"/>
+                  </a:schemeClr>
                 </a:solidFill>
                 <a:latin typeface="Calibri"/>
                 <a:cs typeface="Calibri"/>
@@ -16254,7 +15565,10 @@
             <a:r>
               <a:rPr sz="2550" spc="-155" dirty="0">
                 <a:solidFill>
-                  <a:srgbClr val="363636"/>
+                  <a:schemeClr val="tx1">
+                    <a:lumMod val="75000"/>
+                    <a:lumOff val="25000"/>
+                  </a:schemeClr>
                 </a:solidFill>
                 <a:latin typeface="Calibri"/>
                 <a:cs typeface="Calibri"/>
@@ -16264,7 +15578,10 @@
             <a:r>
               <a:rPr sz="2550" dirty="0">
                 <a:solidFill>
-                  <a:srgbClr val="262626"/>
+                  <a:schemeClr val="tx1">
+                    <a:lumMod val="75000"/>
+                    <a:lumOff val="25000"/>
+                  </a:schemeClr>
                 </a:solidFill>
                 <a:latin typeface="Calibri"/>
                 <a:cs typeface="Calibri"/>
@@ -16274,7 +15591,10 @@
             <a:r>
               <a:rPr sz="2550" spc="-130" dirty="0">
                 <a:solidFill>
-                  <a:srgbClr val="262626"/>
+                  <a:schemeClr val="tx1">
+                    <a:lumMod val="75000"/>
+                    <a:lumOff val="25000"/>
+                  </a:schemeClr>
                 </a:solidFill>
                 <a:latin typeface="Calibri"/>
                 <a:cs typeface="Calibri"/>
@@ -16284,7 +15604,10 @@
             <a:r>
               <a:rPr sz="2550" dirty="0">
                 <a:solidFill>
-                  <a:srgbClr val="3F3F3F"/>
+                  <a:schemeClr val="tx1">
+                    <a:lumMod val="75000"/>
+                    <a:lumOff val="25000"/>
+                  </a:schemeClr>
                 </a:solidFill>
                 <a:latin typeface="Calibri"/>
                 <a:cs typeface="Calibri"/>
@@ -16294,7 +15617,10 @@
             <a:r>
               <a:rPr sz="2550" spc="-85" dirty="0">
                 <a:solidFill>
-                  <a:srgbClr val="3F3F3F"/>
+                  <a:schemeClr val="tx1">
+                    <a:lumMod val="75000"/>
+                    <a:lumOff val="25000"/>
+                  </a:schemeClr>
                 </a:solidFill>
                 <a:latin typeface="Calibri"/>
                 <a:cs typeface="Calibri"/>
@@ -16304,7 +15630,10 @@
             <a:r>
               <a:rPr sz="2550" spc="65" dirty="0">
                 <a:solidFill>
-                  <a:srgbClr val="313131"/>
+                  <a:schemeClr val="tx1">
+                    <a:lumMod val="75000"/>
+                    <a:lumOff val="25000"/>
+                  </a:schemeClr>
                 </a:solidFill>
                 <a:latin typeface="Calibri"/>
                 <a:cs typeface="Calibri"/>
@@ -16314,7 +15643,10 @@
             <a:r>
               <a:rPr sz="2550" spc="-85" dirty="0">
                 <a:solidFill>
-                  <a:srgbClr val="313131"/>
+                  <a:schemeClr val="tx1">
+                    <a:lumMod val="75000"/>
+                    <a:lumOff val="25000"/>
+                  </a:schemeClr>
                 </a:solidFill>
                 <a:latin typeface="Calibri"/>
                 <a:cs typeface="Calibri"/>
@@ -16324,7 +15656,10 @@
             <a:r>
               <a:rPr sz="2550" dirty="0">
                 <a:solidFill>
-                  <a:srgbClr val="333333"/>
+                  <a:schemeClr val="tx1">
+                    <a:lumMod val="75000"/>
+                    <a:lumOff val="25000"/>
+                  </a:schemeClr>
                 </a:solidFill>
                 <a:latin typeface="Calibri"/>
                 <a:cs typeface="Calibri"/>
@@ -16334,7 +15669,10 @@
             <a:r>
               <a:rPr sz="2550" spc="20" dirty="0">
                 <a:solidFill>
-                  <a:srgbClr val="333333"/>
+                  <a:schemeClr val="tx1">
+                    <a:lumMod val="75000"/>
+                    <a:lumOff val="25000"/>
+                  </a:schemeClr>
                 </a:solidFill>
                 <a:latin typeface="Calibri"/>
                 <a:cs typeface="Calibri"/>
@@ -16344,7 +15682,10 @@
             <a:r>
               <a:rPr sz="2550" dirty="0">
                 <a:solidFill>
-                  <a:srgbClr val="313131"/>
+                  <a:schemeClr val="tx1">
+                    <a:lumMod val="75000"/>
+                    <a:lumOff val="25000"/>
+                  </a:schemeClr>
                 </a:solidFill>
                 <a:latin typeface="Calibri"/>
                 <a:cs typeface="Calibri"/>
@@ -16354,7 +15695,10 @@
             <a:r>
               <a:rPr sz="2550" spc="160" dirty="0">
                 <a:solidFill>
-                  <a:srgbClr val="313131"/>
+                  <a:schemeClr val="tx1">
+                    <a:lumMod val="75000"/>
+                    <a:lumOff val="25000"/>
+                  </a:schemeClr>
                 </a:solidFill>
                 <a:latin typeface="Calibri"/>
                 <a:cs typeface="Calibri"/>
@@ -16364,7 +15708,10 @@
             <a:r>
               <a:rPr sz="2550" spc="-40" dirty="0">
                 <a:solidFill>
-                  <a:srgbClr val="2D2D2D"/>
+                  <a:schemeClr val="tx1">
+                    <a:lumMod val="75000"/>
+                    <a:lumOff val="25000"/>
+                  </a:schemeClr>
                 </a:solidFill>
                 <a:latin typeface="Calibri"/>
                 <a:cs typeface="Calibri"/>
@@ -16374,7 +15721,10 @@
             <a:r>
               <a:rPr sz="2550" spc="-95" dirty="0">
                 <a:solidFill>
-                  <a:srgbClr val="2D2D2D"/>
+                  <a:schemeClr val="tx1">
+                    <a:lumMod val="75000"/>
+                    <a:lumOff val="25000"/>
+                  </a:schemeClr>
                 </a:solidFill>
                 <a:latin typeface="Calibri"/>
                 <a:cs typeface="Calibri"/>
@@ -16384,7 +15734,10 @@
             <a:r>
               <a:rPr sz="2550" dirty="0">
                 <a:solidFill>
-                  <a:srgbClr val="2A2A2A"/>
+                  <a:schemeClr val="tx1">
+                    <a:lumMod val="75000"/>
+                    <a:lumOff val="25000"/>
+                  </a:schemeClr>
                 </a:solidFill>
                 <a:latin typeface="Calibri"/>
                 <a:cs typeface="Calibri"/>
@@ -16394,7 +15747,10 @@
             <a:r>
               <a:rPr sz="2550" spc="135" dirty="0">
                 <a:solidFill>
-                  <a:srgbClr val="2A2A2A"/>
+                  <a:schemeClr val="tx1">
+                    <a:lumMod val="75000"/>
+                    <a:lumOff val="25000"/>
+                  </a:schemeClr>
                 </a:solidFill>
                 <a:latin typeface="Calibri"/>
                 <a:cs typeface="Calibri"/>
@@ -16404,7 +15760,10 @@
             <a:r>
               <a:rPr sz="2550" dirty="0">
                 <a:solidFill>
-                  <a:srgbClr val="313131"/>
+                  <a:schemeClr val="tx1">
+                    <a:lumMod val="75000"/>
+                    <a:lumOff val="25000"/>
+                  </a:schemeClr>
                 </a:solidFill>
                 <a:latin typeface="Calibri"/>
                 <a:cs typeface="Calibri"/>
@@ -16414,7 +15773,10 @@
             <a:r>
               <a:rPr sz="2550" spc="-85" dirty="0">
                 <a:solidFill>
-                  <a:srgbClr val="313131"/>
+                  <a:schemeClr val="tx1">
+                    <a:lumMod val="75000"/>
+                    <a:lumOff val="25000"/>
+                  </a:schemeClr>
                 </a:solidFill>
                 <a:latin typeface="Calibri"/>
                 <a:cs typeface="Calibri"/>
@@ -16424,7 +15786,10 @@
             <a:r>
               <a:rPr sz="2550" spc="-25" dirty="0">
                 <a:solidFill>
-                  <a:srgbClr val="343434"/>
+                  <a:schemeClr val="tx1">
+                    <a:lumMod val="75000"/>
+                    <a:lumOff val="25000"/>
+                  </a:schemeClr>
                 </a:solidFill>
                 <a:latin typeface="Calibri"/>
                 <a:cs typeface="Calibri"/>
@@ -16434,7 +15799,10 @@
             <a:r>
               <a:rPr sz="2550" dirty="0">
                 <a:solidFill>
-                  <a:srgbClr val="2D2D2D"/>
+                  <a:schemeClr val="tx1">
+                    <a:lumMod val="75000"/>
+                    <a:lumOff val="25000"/>
+                  </a:schemeClr>
                 </a:solidFill>
                 <a:latin typeface="Calibri"/>
                 <a:cs typeface="Calibri"/>
@@ -16444,7 +15812,10 @@
             <a:r>
               <a:rPr sz="2550" spc="250" dirty="0">
                 <a:solidFill>
-                  <a:srgbClr val="2D2D2D"/>
+                  <a:schemeClr val="tx1">
+                    <a:lumMod val="75000"/>
+                    <a:lumOff val="25000"/>
+                  </a:schemeClr>
                 </a:solidFill>
                 <a:latin typeface="Calibri"/>
                 <a:cs typeface="Calibri"/>
@@ -16454,7 +15825,10 @@
             <a:r>
               <a:rPr sz="2550" dirty="0">
                 <a:solidFill>
-                  <a:srgbClr val="2D2D2D"/>
+                  <a:schemeClr val="tx1">
+                    <a:lumMod val="75000"/>
+                    <a:lumOff val="25000"/>
+                  </a:schemeClr>
                 </a:solidFill>
                 <a:latin typeface="Calibri"/>
                 <a:cs typeface="Calibri"/>
@@ -16464,7 +15838,10 @@
             <a:r>
               <a:rPr sz="2550" spc="45" dirty="0">
                 <a:solidFill>
-                  <a:srgbClr val="2D2D2D"/>
+                  <a:schemeClr val="tx1">
+                    <a:lumMod val="75000"/>
+                    <a:lumOff val="25000"/>
+                  </a:schemeClr>
                 </a:solidFill>
                 <a:latin typeface="Calibri"/>
                 <a:cs typeface="Calibri"/>
@@ -16474,7 +15851,10 @@
             <a:r>
               <a:rPr sz="2550" spc="-20" dirty="0">
                 <a:solidFill>
-                  <a:srgbClr val="343434"/>
+                  <a:schemeClr val="tx1">
+                    <a:lumMod val="75000"/>
+                    <a:lumOff val="25000"/>
+                  </a:schemeClr>
                 </a:solidFill>
                 <a:latin typeface="Calibri"/>
                 <a:cs typeface="Calibri"/>
@@ -16484,7 +15864,10 @@
             <a:r>
               <a:rPr sz="2550" spc="-50" dirty="0">
                 <a:solidFill>
-                  <a:srgbClr val="343434"/>
+                  <a:schemeClr val="tx1">
+                    <a:lumMod val="75000"/>
+                    <a:lumOff val="25000"/>
+                  </a:schemeClr>
                 </a:solidFill>
                 <a:latin typeface="Calibri"/>
                 <a:cs typeface="Calibri"/>
@@ -16494,7 +15877,10 @@
             <a:r>
               <a:rPr sz="2550" dirty="0">
                 <a:solidFill>
-                  <a:srgbClr val="343434"/>
+                  <a:schemeClr val="tx1">
+                    <a:lumMod val="75000"/>
+                    <a:lumOff val="25000"/>
+                  </a:schemeClr>
                 </a:solidFill>
                 <a:latin typeface="Calibri"/>
                 <a:cs typeface="Calibri"/>
@@ -16504,7 +15890,10 @@
             <a:r>
               <a:rPr sz="2550" spc="-55" dirty="0">
                 <a:solidFill>
-                  <a:srgbClr val="343434"/>
+                  <a:schemeClr val="tx1">
+                    <a:lumMod val="75000"/>
+                    <a:lumOff val="25000"/>
+                  </a:schemeClr>
                 </a:solidFill>
                 <a:latin typeface="Calibri"/>
                 <a:cs typeface="Calibri"/>
@@ -16514,7 +15903,10 @@
             <a:r>
               <a:rPr sz="2550" dirty="0">
                 <a:solidFill>
-                  <a:srgbClr val="2D2D2D"/>
+                  <a:schemeClr val="tx1">
+                    <a:lumMod val="75000"/>
+                    <a:lumOff val="25000"/>
+                  </a:schemeClr>
                 </a:solidFill>
                 <a:latin typeface="Calibri"/>
                 <a:cs typeface="Calibri"/>
@@ -16524,7 +15916,10 @@
             <a:r>
               <a:rPr sz="2550" spc="65" dirty="0">
                 <a:solidFill>
-                  <a:srgbClr val="2D2D2D"/>
+                  <a:schemeClr val="tx1">
+                    <a:lumMod val="75000"/>
+                    <a:lumOff val="25000"/>
+                  </a:schemeClr>
                 </a:solidFill>
                 <a:latin typeface="Calibri"/>
                 <a:cs typeface="Calibri"/>
@@ -16534,7 +15929,10 @@
             <a:r>
               <a:rPr sz="2550" dirty="0">
                 <a:solidFill>
-                  <a:srgbClr val="363636"/>
+                  <a:schemeClr val="tx1">
+                    <a:lumMod val="75000"/>
+                    <a:lumOff val="25000"/>
+                  </a:schemeClr>
                 </a:solidFill>
                 <a:latin typeface="Calibri"/>
                 <a:cs typeface="Calibri"/>
@@ -16544,7 +15942,10 @@
             <a:r>
               <a:rPr sz="2550" spc="215" dirty="0">
                 <a:solidFill>
-                  <a:srgbClr val="363636"/>
+                  <a:schemeClr val="tx1">
+                    <a:lumMod val="75000"/>
+                    <a:lumOff val="25000"/>
+                  </a:schemeClr>
                 </a:solidFill>
                 <a:latin typeface="Calibri"/>
                 <a:cs typeface="Calibri"/>
@@ -16554,7 +15955,10 @@
             <a:r>
               <a:rPr sz="2550" dirty="0">
                 <a:solidFill>
-                  <a:srgbClr val="363636"/>
+                  <a:schemeClr val="tx1">
+                    <a:lumMod val="75000"/>
+                    <a:lumOff val="25000"/>
+                  </a:schemeClr>
                 </a:solidFill>
                 <a:latin typeface="Calibri"/>
                 <a:cs typeface="Calibri"/>
@@ -16564,7 +15968,10 @@
             <a:r>
               <a:rPr sz="2550" spc="-35" dirty="0">
                 <a:solidFill>
-                  <a:srgbClr val="363636"/>
+                  <a:schemeClr val="tx1">
+                    <a:lumMod val="75000"/>
+                    <a:lumOff val="25000"/>
+                  </a:schemeClr>
                 </a:solidFill>
                 <a:latin typeface="Calibri"/>
                 <a:cs typeface="Calibri"/>
@@ -16574,7 +15981,10 @@
             <a:r>
               <a:rPr sz="2550" spc="-10" dirty="0">
                 <a:solidFill>
-                  <a:srgbClr val="383838"/>
+                  <a:schemeClr val="tx1">
+                    <a:lumMod val="75000"/>
+                    <a:lumOff val="25000"/>
+                  </a:schemeClr>
                 </a:solidFill>
                 <a:latin typeface="Calibri"/>
                 <a:cs typeface="Calibri"/>
@@ -16584,7 +15994,10 @@
             <a:r>
               <a:rPr sz="2550" spc="-45" dirty="0">
                 <a:solidFill>
-                  <a:srgbClr val="383838"/>
+                  <a:schemeClr val="tx1">
+                    <a:lumMod val="75000"/>
+                    <a:lumOff val="25000"/>
+                  </a:schemeClr>
                 </a:solidFill>
                 <a:latin typeface="Calibri"/>
                 <a:cs typeface="Calibri"/>
@@ -16594,7 +16007,10 @@
             <a:r>
               <a:rPr sz="2550" dirty="0">
                 <a:solidFill>
-                  <a:srgbClr val="313131"/>
+                  <a:schemeClr val="tx1">
+                    <a:lumMod val="75000"/>
+                    <a:lumOff val="25000"/>
+                  </a:schemeClr>
                 </a:solidFill>
                 <a:latin typeface="Calibri"/>
                 <a:cs typeface="Calibri"/>
@@ -16604,7 +16020,10 @@
             <a:r>
               <a:rPr sz="2550" spc="-40" dirty="0">
                 <a:solidFill>
-                  <a:srgbClr val="313131"/>
+                  <a:schemeClr val="tx1">
+                    <a:lumMod val="75000"/>
+                    <a:lumOff val="25000"/>
+                  </a:schemeClr>
                 </a:solidFill>
                 <a:latin typeface="Calibri"/>
                 <a:cs typeface="Calibri"/>
@@ -16614,7 +16033,10 @@
             <a:r>
               <a:rPr sz="2550" dirty="0">
                 <a:solidFill>
-                  <a:srgbClr val="343434"/>
+                  <a:schemeClr val="tx1">
+                    <a:lumMod val="75000"/>
+                    <a:lumOff val="25000"/>
+                  </a:schemeClr>
                 </a:solidFill>
                 <a:latin typeface="Calibri"/>
                 <a:cs typeface="Calibri"/>
@@ -16624,7 +16046,10 @@
             <a:r>
               <a:rPr sz="2550" spc="45" dirty="0">
                 <a:solidFill>
-                  <a:srgbClr val="343434"/>
+                  <a:schemeClr val="tx1">
+                    <a:lumMod val="75000"/>
+                    <a:lumOff val="25000"/>
+                  </a:schemeClr>
                 </a:solidFill>
                 <a:latin typeface="Calibri"/>
                 <a:cs typeface="Calibri"/>
@@ -16634,7 +16059,10 @@
             <a:r>
               <a:rPr sz="2550" spc="-35" dirty="0">
                 <a:solidFill>
-                  <a:srgbClr val="343434"/>
+                  <a:schemeClr val="tx1">
+                    <a:lumMod val="75000"/>
+                    <a:lumOff val="25000"/>
+                  </a:schemeClr>
                 </a:solidFill>
                 <a:latin typeface="Calibri"/>
                 <a:cs typeface="Calibri"/>
@@ -16644,7 +16072,10 @@
             <a:r>
               <a:rPr sz="2550" dirty="0">
                 <a:solidFill>
-                  <a:srgbClr val="383838"/>
+                  <a:schemeClr val="tx1">
+                    <a:lumMod val="75000"/>
+                    <a:lumOff val="25000"/>
+                  </a:schemeClr>
                 </a:solidFill>
                 <a:latin typeface="Calibri"/>
                 <a:cs typeface="Calibri"/>
@@ -16654,7 +16085,10 @@
             <a:r>
               <a:rPr sz="2550" spc="-90" dirty="0">
                 <a:solidFill>
-                  <a:srgbClr val="383838"/>
+                  <a:schemeClr val="tx1">
+                    <a:lumMod val="75000"/>
+                    <a:lumOff val="25000"/>
+                  </a:schemeClr>
                 </a:solidFill>
                 <a:latin typeface="Calibri"/>
                 <a:cs typeface="Calibri"/>
@@ -16664,7 +16098,10 @@
             <a:r>
               <a:rPr sz="2550" dirty="0">
                 <a:solidFill>
-                  <a:srgbClr val="313131"/>
+                  <a:schemeClr val="tx1">
+                    <a:lumMod val="75000"/>
+                    <a:lumOff val="25000"/>
+                  </a:schemeClr>
                 </a:solidFill>
                 <a:latin typeface="Calibri"/>
                 <a:cs typeface="Calibri"/>
@@ -16674,7 +16111,10 @@
             <a:r>
               <a:rPr sz="2550" spc="-160" dirty="0">
                 <a:solidFill>
-                  <a:srgbClr val="313131"/>
+                  <a:schemeClr val="tx1">
+                    <a:lumMod val="75000"/>
+                    <a:lumOff val="25000"/>
+                  </a:schemeClr>
                 </a:solidFill>
                 <a:latin typeface="Calibri"/>
                 <a:cs typeface="Calibri"/>
@@ -16684,7 +16124,10 @@
             <a:r>
               <a:rPr sz="2550" dirty="0">
                 <a:solidFill>
-                  <a:srgbClr val="2F2F2F"/>
+                  <a:schemeClr val="tx1">
+                    <a:lumMod val="75000"/>
+                    <a:lumOff val="25000"/>
+                  </a:schemeClr>
                 </a:solidFill>
                 <a:latin typeface="Calibri"/>
                 <a:cs typeface="Calibri"/>
@@ -16694,7 +16137,10 @@
             <a:r>
               <a:rPr sz="2550" spc="-10" dirty="0">
                 <a:solidFill>
-                  <a:srgbClr val="2F2F2F"/>
+                  <a:schemeClr val="tx1">
+                    <a:lumMod val="75000"/>
+                    <a:lumOff val="25000"/>
+                  </a:schemeClr>
                 </a:solidFill>
                 <a:latin typeface="Calibri"/>
                 <a:cs typeface="Calibri"/>
@@ -16704,7 +16150,10 @@
             <a:r>
               <a:rPr sz="2550" dirty="0">
                 <a:solidFill>
-                  <a:srgbClr val="343434"/>
+                  <a:schemeClr val="tx1">
+                    <a:lumMod val="75000"/>
+                    <a:lumOff val="25000"/>
+                  </a:schemeClr>
                 </a:solidFill>
                 <a:latin typeface="Calibri"/>
                 <a:cs typeface="Calibri"/>
@@ -16714,7 +16163,10 @@
             <a:r>
               <a:rPr sz="2550" spc="-30" dirty="0">
                 <a:solidFill>
-                  <a:srgbClr val="343434"/>
+                  <a:schemeClr val="tx1">
+                    <a:lumMod val="75000"/>
+                    <a:lumOff val="25000"/>
+                  </a:schemeClr>
                 </a:solidFill>
                 <a:latin typeface="Calibri"/>
                 <a:cs typeface="Calibri"/>
@@ -16724,7 +16176,10 @@
             <a:r>
               <a:rPr sz="2550" dirty="0">
                 <a:solidFill>
-                  <a:srgbClr val="313131"/>
+                  <a:schemeClr val="tx1">
+                    <a:lumMod val="75000"/>
+                    <a:lumOff val="25000"/>
+                  </a:schemeClr>
                 </a:solidFill>
                 <a:latin typeface="Calibri"/>
                 <a:cs typeface="Calibri"/>
@@ -16734,7 +16189,10 @@
             <a:r>
               <a:rPr sz="2550" spc="-80" dirty="0">
                 <a:solidFill>
-                  <a:srgbClr val="313131"/>
+                  <a:schemeClr val="tx1">
+                    <a:lumMod val="75000"/>
+                    <a:lumOff val="25000"/>
+                  </a:schemeClr>
                 </a:solidFill>
                 <a:latin typeface="Calibri"/>
                 <a:cs typeface="Calibri"/>
@@ -16744,7 +16202,10 @@
             <a:r>
               <a:rPr sz="2550" spc="90" dirty="0">
                 <a:solidFill>
-                  <a:srgbClr val="2D4256"/>
+                  <a:schemeClr val="tx1">
+                    <a:lumMod val="75000"/>
+                    <a:lumOff val="25000"/>
+                  </a:schemeClr>
                 </a:solidFill>
                 <a:latin typeface="Calibri"/>
                 <a:cs typeface="Calibri"/>
@@ -16754,7 +16215,10 @@
             <a:r>
               <a:rPr sz="2550" spc="-135" dirty="0">
                 <a:solidFill>
-                  <a:srgbClr val="2D4256"/>
+                  <a:schemeClr val="tx1">
+                    <a:lumMod val="75000"/>
+                    <a:lumOff val="25000"/>
+                  </a:schemeClr>
                 </a:solidFill>
                 <a:latin typeface="Calibri"/>
                 <a:cs typeface="Calibri"/>
@@ -16764,7 +16228,10 @@
             <a:r>
               <a:rPr sz="2550" spc="-10" dirty="0">
                 <a:solidFill>
-                  <a:srgbClr val="313131"/>
+                  <a:schemeClr val="tx1">
+                    <a:lumMod val="75000"/>
+                    <a:lumOff val="25000"/>
+                  </a:schemeClr>
                 </a:solidFill>
                 <a:latin typeface="Calibri"/>
                 <a:cs typeface="Calibri"/>
@@ -16772,6 +16239,12 @@
               <a:t>indeksu.</a:t>
             </a:r>
             <a:endParaRPr sz="2550" dirty="0">
+              <a:solidFill>
+                <a:schemeClr val="tx1">
+                  <a:lumMod val="75000"/>
+                  <a:lumOff val="25000"/>
+                </a:schemeClr>
+              </a:solidFill>
               <a:latin typeface="Calibri"/>
               <a:cs typeface="Calibri"/>
             </a:endParaRPr>
@@ -17493,12 +16966,24 @@
             </a:pPr>
             <a:r>
               <a:rPr lang="sr-Latn-RS" sz="1800" dirty="0">
+                <a:solidFill>
+                  <a:schemeClr val="tx1">
+                    <a:lumMod val="75000"/>
+                    <a:lumOff val="25000"/>
+                  </a:schemeClr>
+                </a:solidFill>
                 <a:latin typeface="+mj-lt"/>
                 <a:cs typeface="Cambria"/>
               </a:rPr>
               <a:t>Kolona prezime se koristi za filtriranje (u B-Tree ključu), a kolona ime je prisutna u indeksnom unosu kao sekundarni ključ. Optimizator može sve potrebne podatke (ime i prezime) pročitati direktno iz indeksa, bez ijednog odlaska u tabelu.</a:t>
             </a:r>
             <a:endParaRPr sz="1800" dirty="0">
+              <a:solidFill>
+                <a:schemeClr val="tx1">
+                  <a:lumMod val="75000"/>
+                  <a:lumOff val="25000"/>
+                </a:schemeClr>
+              </a:solidFill>
               <a:latin typeface="+mj-lt"/>
               <a:cs typeface="Cambria"/>
             </a:endParaRPr>
@@ -18658,7 +18143,7 @@
               <a:t>all-</a:t>
             </a:r>
             <a:r>
-              <a:rPr lang="sr-Latn-RS" sz="2550" b="1" spc="-20" dirty="0">
+              <a:rPr lang="sr-Latn-RS" sz="2550" spc="-20" dirty="0">
                 <a:solidFill>
                   <a:srgbClr val="343434"/>
                 </a:solidFill>
@@ -19610,7 +19095,7 @@
               <a:t> </a:t>
             </a:r>
             <a:r>
-              <a:rPr sz="2550" b="1" spc="-75" dirty="0">
+              <a:rPr sz="2550" b="1" spc="-75" dirty="0" err="1">
                 <a:solidFill>
                   <a:srgbClr val="00497B"/>
                 </a:solidFill>
@@ -19630,7 +19115,7 @@
               <a:t> </a:t>
             </a:r>
             <a:r>
-              <a:rPr sz="2550" b="1" spc="-10" dirty="0">
+              <a:rPr sz="2550" b="1" spc="-10" dirty="0" err="1">
                 <a:solidFill>
                   <a:srgbClr val="004D90"/>
                 </a:solidFill>
@@ -19639,7 +19124,7 @@
               </a:rPr>
               <a:t>bitmapa</a:t>
             </a:r>
-            <a:endParaRPr sz="2550" b="1" dirty="0">
+            <a:endParaRPr lang="en-US" sz="2550" b="1" dirty="0">
               <a:latin typeface="+mj-lt"/>
               <a:cs typeface="Cambria"/>
             </a:endParaRPr>
@@ -21178,10 +20663,10 @@
       </p:sp>
       <p:pic>
         <p:nvPicPr>
-          <p:cNvPr id="9" name="object 2">
+          <p:cNvPr id="10" name="object 2">
             <a:extLst>
               <a:ext uri="{FF2B5EF4-FFF2-40B4-BE49-F238E27FC236}">
-                <a16:creationId xmlns:a16="http://schemas.microsoft.com/office/drawing/2014/main" id="{6221AC19-4B59-8208-C045-5C5A6350F1AC}"/>
+                <a16:creationId xmlns:a16="http://schemas.microsoft.com/office/drawing/2014/main" id="{08A5FA8B-8589-9E20-B48B-C8DC7B4C1D2B}"/>
               </a:ext>
             </a:extLst>
           </p:cNvPr>
@@ -21189,15 +20674,15 @@
           <p:nvPr/>
         </p:nvPicPr>
         <p:blipFill>
-          <a:blip r:embed="rId2" cstate="print"/>
+          <a:blip r:embed="rId4" cstate="print"/>
           <a:stretch>
             <a:fillRect/>
           </a:stretch>
         </p:blipFill>
         <p:spPr>
           <a:xfrm>
-            <a:off x="3417631" y="4036526"/>
-            <a:ext cx="801022" cy="659665"/>
+            <a:off x="3369406" y="4036526"/>
+            <a:ext cx="801022" cy="785316"/>
           </a:xfrm>
           <a:prstGeom prst="rect">
             <a:avLst/>
@@ -22556,7 +22041,7 @@
           <p:nvPr>
             <p:extLst>
               <p:ext uri="{D42A27DB-BD31-4B8C-83A1-F6EECF244321}">
-                <p14:modId xmlns:p14="http://schemas.microsoft.com/office/powerpoint/2010/main" val="3321817552"/>
+                <p14:modId xmlns:p14="http://schemas.microsoft.com/office/powerpoint/2010/main" val="1825164381"/>
               </p:ext>
             </p:extLst>
           </p:nvPr>
@@ -22590,7 +22075,7 @@
                         <a:buNone/>
                       </a:pPr>
                       <a:r>
-                        <a:rPr lang="sr-Latn-RS" sz="2400" dirty="0">
+                        <a:rPr lang="sr-Latn-RS" sz="2400" i="1" dirty="0">
                           <a:effectLst/>
                         </a:rPr>
                         <a:t>CREATE TABLE korisnici (</a:t>
@@ -22601,10 +22086,22 @@
                         <a:buNone/>
                       </a:pPr>
                       <a:r>
-                        <a:rPr lang="sr-Latn-RS" sz="2400" dirty="0">
+                        <a:rPr lang="sr-Latn-RS" sz="2400" i="1" dirty="0">
                           <a:effectLst/>
                         </a:rPr>
-                        <a:t>    id              SERIAL PRIMARY KEY,</a:t>
+                        <a:t>    id              </a:t>
+                      </a:r>
+                      <a:r>
+                        <a:rPr lang="en-US" sz="2400" i="1" dirty="0">
+                          <a:effectLst/>
+                        </a:rPr>
+                        <a:t>               </a:t>
+                      </a:r>
+                      <a:r>
+                        <a:rPr lang="sr-Latn-RS" sz="2400" i="1" dirty="0">
+                          <a:effectLst/>
+                        </a:rPr>
+                        <a:t>SERIAL PRIMARY KEY,</a:t>
                       </a:r>
                     </a:p>
                     <a:p>
@@ -22612,10 +22109,22 @@
                         <a:buNone/>
                       </a:pPr>
                       <a:r>
-                        <a:rPr lang="sr-Latn-RS" sz="2400" dirty="0">
+                        <a:rPr lang="sr-Latn-RS" sz="2400" i="1" dirty="0">
                           <a:effectLst/>
                         </a:rPr>
-                        <a:t>    ime             VARCHAR(50),</a:t>
+                        <a:t>    ime             </a:t>
+                      </a:r>
+                      <a:r>
+                        <a:rPr lang="en-US" sz="2400" i="1" dirty="0">
+                          <a:effectLst/>
+                        </a:rPr>
+                        <a:t>             </a:t>
+                      </a:r>
+                      <a:r>
+                        <a:rPr lang="sr-Latn-RS" sz="2400" i="1" dirty="0">
+                          <a:effectLst/>
+                        </a:rPr>
+                        <a:t>VARCHAR(50),</a:t>
                       </a:r>
                     </a:p>
                     <a:p>
@@ -22623,10 +22132,22 @@
                         <a:buNone/>
                       </a:pPr>
                       <a:r>
-                        <a:rPr lang="sr-Latn-RS" sz="2400" dirty="0">
+                        <a:rPr lang="sr-Latn-RS" sz="2400" i="1" dirty="0">
                           <a:effectLst/>
                         </a:rPr>
-                        <a:t>    prezime         VARCHAR(50),</a:t>
+                        <a:t>    prezime         </a:t>
+                      </a:r>
+                      <a:r>
+                        <a:rPr lang="en-US" sz="2400" i="1" dirty="0">
+                          <a:effectLst/>
+                        </a:rPr>
+                        <a:t>         </a:t>
+                      </a:r>
+                      <a:r>
+                        <a:rPr lang="sr-Latn-RS" sz="2400" i="1" dirty="0">
+                          <a:effectLst/>
+                        </a:rPr>
+                        <a:t>VARCHAR(50),</a:t>
                       </a:r>
                     </a:p>
                     <a:p>
@@ -22634,10 +22155,22 @@
                         <a:buNone/>
                       </a:pPr>
                       <a:r>
-                        <a:rPr lang="sr-Latn-RS" sz="2400" dirty="0">
+                        <a:rPr lang="sr-Latn-RS" sz="2400" i="1" dirty="0">
                           <a:effectLst/>
                         </a:rPr>
-                        <a:t>    grad            VARCHAR(50),</a:t>
+                        <a:t>    grad            </a:t>
+                      </a:r>
+                      <a:r>
+                        <a:rPr lang="en-US" sz="2400" i="1" dirty="0">
+                          <a:effectLst/>
+                        </a:rPr>
+                        <a:t>            </a:t>
+                      </a:r>
+                      <a:r>
+                        <a:rPr lang="sr-Latn-RS" sz="2400" i="1" dirty="0">
+                          <a:effectLst/>
+                        </a:rPr>
+                        <a:t>VARCHAR(50),</a:t>
                       </a:r>
                     </a:p>
                     <a:p>
@@ -22645,10 +22178,22 @@
                         <a:buNone/>
                       </a:pPr>
                       <a:r>
-                        <a:rPr lang="sr-Latn-RS" sz="2400" dirty="0">
+                        <a:rPr lang="sr-Latn-RS" sz="2400" i="1" dirty="0">
                           <a:effectLst/>
                         </a:rPr>
-                        <a:t>    datum_rodjenja  DATE,</a:t>
+                        <a:t>    datum_rodjenja  </a:t>
+                      </a:r>
+                      <a:r>
+                        <a:rPr lang="en-US" sz="2400" i="1" dirty="0">
+                          <a:effectLst/>
+                        </a:rPr>
+                        <a:t> </a:t>
+                      </a:r>
+                      <a:r>
+                        <a:rPr lang="sr-Latn-RS" sz="2400" i="1" dirty="0">
+                          <a:effectLst/>
+                        </a:rPr>
+                        <a:t>DATE,</a:t>
                       </a:r>
                     </a:p>
                     <a:p>
@@ -22656,10 +22201,22 @@
                         <a:buNone/>
                       </a:pPr>
                       <a:r>
-                        <a:rPr lang="sr-Latn-RS" sz="2400" dirty="0">
+                        <a:rPr lang="sr-Latn-RS" sz="2400" i="1" dirty="0">
                           <a:effectLst/>
                         </a:rPr>
-                        <a:t>    bio             TEXT</a:t>
+                        <a:t>    bio             </a:t>
+                      </a:r>
+                      <a:r>
+                        <a:rPr lang="en-US" sz="2400" i="1" dirty="0">
+                          <a:effectLst/>
+                        </a:rPr>
+                        <a:t>             </a:t>
+                      </a:r>
+                      <a:r>
+                        <a:rPr lang="sr-Latn-RS" sz="2400" i="1" dirty="0">
+                          <a:effectLst/>
+                        </a:rPr>
+                        <a:t>TEXT</a:t>
                       </a:r>
                     </a:p>
                     <a:p>
@@ -22667,12 +22224,12 @@
                         <a:buNone/>
                       </a:pPr>
                       <a:r>
-                        <a:rPr lang="sr-Latn-RS" sz="2400" dirty="0">
+                        <a:rPr lang="sr-Latn-RS" sz="2400" i="1" dirty="0">
                           <a:effectLst/>
                         </a:rPr>
                         <a:t>);</a:t>
                       </a:r>
-                      <a:endParaRPr lang="sr-Latn-RS" sz="2400" dirty="0">
+                      <a:endParaRPr lang="sr-Latn-RS" sz="2400" i="1" dirty="0">
                         <a:effectLst/>
                         <a:latin typeface="Arial" panose="020B0604020202020204" pitchFamily="34" charset="0"/>
                         <a:ea typeface="Arial" panose="020B0604020202020204" pitchFamily="34" charset="0"/>

--- a/P1/Index-Only i Bitmap Index Scan u PostgreSQL.pptx
+++ b/P1/Index-Only i Bitmap Index Scan u PostgreSQL.pptx
@@ -1074,7 +1074,7 @@
           <a:p>
             <a:fld id="{1D8BD707-D9CF-40AE-B4C6-C98DA3205C09}" type="datetimeFigureOut">
               <a:rPr lang="en-US"/>
-              <a:t>5/11/2026</a:t>
+              <a:t>5/18/2026</a:t>
             </a:fld>
             <a:endParaRPr lang="en-US"/>
           </a:p>
@@ -1249,7 +1249,7 @@
           <a:p>
             <a:fld id="{1D8BD707-D9CF-40AE-B4C6-C98DA3205C09}" type="datetimeFigureOut">
               <a:rPr lang="en-US"/>
-              <a:t>5/11/2026</a:t>
+              <a:t>5/18/2026</a:t>
             </a:fld>
             <a:endParaRPr lang="en-US"/>
           </a:p>
@@ -1475,7 +1475,7 @@
           <a:p>
             <a:fld id="{1D8BD707-D9CF-40AE-B4C6-C98DA3205C09}" type="datetimeFigureOut">
               <a:rPr lang="en-US"/>
-              <a:t>5/11/2026</a:t>
+              <a:t>5/18/2026</a:t>
             </a:fld>
             <a:endParaRPr lang="en-US"/>
           </a:p>
@@ -1623,7 +1623,7 @@
           <a:p>
             <a:fld id="{1D8BD707-D9CF-40AE-B4C6-C98DA3205C09}" type="datetimeFigureOut">
               <a:rPr lang="en-US"/>
-              <a:t>5/11/2026</a:t>
+              <a:t>5/18/2026</a:t>
             </a:fld>
             <a:endParaRPr lang="en-US"/>
           </a:p>
@@ -1742,7 +1742,7 @@
           <a:p>
             <a:fld id="{1D8BD707-D9CF-40AE-B4C6-C98DA3205C09}" type="datetimeFigureOut">
               <a:rPr lang="en-US"/>
-              <a:t>5/11/2026</a:t>
+              <a:t>5/18/2026</a:t>
             </a:fld>
             <a:endParaRPr lang="en-US"/>
           </a:p>
@@ -2012,7 +2012,7 @@
           <a:p>
             <a:fld id="{1D8BD707-D9CF-40AE-B4C6-C98DA3205C09}" type="datetimeFigureOut">
               <a:rPr lang="en-US"/>
-              <a:t>5/11/2026</a:t>
+              <a:t>5/18/2026</a:t>
             </a:fld>
             <a:endParaRPr lang="en-US"/>
           </a:p>
@@ -10341,17 +10341,87 @@
               <a:t> </a:t>
             </a:r>
             <a:r>
+              <a:rPr sz="2550" b="0" dirty="0" err="1">
+                <a:solidFill>
+                  <a:srgbClr val="363636"/>
+                </a:solidFill>
+                <a:latin typeface="Calibri"/>
+                <a:cs typeface="Calibri"/>
+              </a:rPr>
+              <a:t>podaci</a:t>
+            </a:r>
+            <a:r>
+              <a:rPr sz="2550" b="0" spc="-60" dirty="0">
+                <a:solidFill>
+                  <a:srgbClr val="363636"/>
+                </a:solidFill>
+                <a:latin typeface="Calibri"/>
+                <a:cs typeface="Calibri"/>
+              </a:rPr>
+              <a:t> </a:t>
+            </a:r>
+            <a:r>
+              <a:rPr sz="2550" b="0" dirty="0" err="1">
+                <a:solidFill>
+                  <a:srgbClr val="343434"/>
+                </a:solidFill>
+                <a:latin typeface="Calibri"/>
+                <a:cs typeface="Calibri"/>
+              </a:rPr>
+              <a:t>ve</a:t>
+            </a:r>
+            <a:r>
+              <a:rPr lang="sr-Latn-RS" sz="2550" b="0" dirty="0">
+                <a:solidFill>
+                  <a:srgbClr val="343434"/>
+                </a:solidFill>
+                <a:latin typeface="Calibri"/>
+                <a:cs typeface="Calibri"/>
+              </a:rPr>
+              <a:t>ć</a:t>
+            </a:r>
+            <a:r>
+              <a:rPr sz="2550" b="0" spc="-114" dirty="0">
+                <a:solidFill>
+                  <a:srgbClr val="343434"/>
+                </a:solidFill>
+                <a:latin typeface="Calibri"/>
+                <a:cs typeface="Calibri"/>
+              </a:rPr>
+              <a:t> </a:t>
+            </a:r>
+            <a:r>
               <a:rPr sz="2550" b="0" dirty="0">
                 <a:solidFill>
+                  <a:srgbClr val="2F2F2F"/>
+                </a:solidFill>
+                <a:latin typeface="Calibri"/>
+                <a:cs typeface="Calibri"/>
+              </a:rPr>
+              <a:t>prisutni</a:t>
+            </a:r>
+            <a:r>
+              <a:rPr sz="2550" b="0" spc="-70" dirty="0">
+                <a:solidFill>
+                  <a:srgbClr val="2F2F2F"/>
+                </a:solidFill>
+                <a:latin typeface="Calibri"/>
+                <a:cs typeface="Calibri"/>
+              </a:rPr>
+              <a:t> </a:t>
+            </a:r>
+            <a:r>
+              <a:rPr sz="2550" b="0" spc="90" dirty="0">
+                <a:solidFill>
                   <a:srgbClr val="363636"/>
                 </a:solidFill>
                 <a:latin typeface="Calibri"/>
                 <a:cs typeface="Calibri"/>
               </a:rPr>
-              <a:t>podaci</a:t>
-            </a:r>
-            <a:r>
-              <a:rPr sz="2550" b="0" spc="-60" dirty="0">
+              <a:t>u</a:t>
+            </a:r>
+            <a:r>
+              <a:rPr sz="2550" b="0" spc="-145" dirty="0">
                 <a:solidFill>
                   <a:srgbClr val="363636"/>
                 </a:solidFill>
@@ -10361,104 +10431,64 @@
               <a:t> </a:t>
             </a:r>
             <a:r>
-              <a:rPr sz="2550" b="0" dirty="0">
-                <a:solidFill>
-                  <a:srgbClr val="343434"/>
-                </a:solidFill>
-                <a:latin typeface="Calibri"/>
-                <a:cs typeface="Calibri"/>
-              </a:rPr>
-              <a:t>več</a:t>
-            </a:r>
-            <a:r>
-              <a:rPr sz="2550" b="0" spc="-114" dirty="0">
-                <a:solidFill>
-                  <a:srgbClr val="343434"/>
-                </a:solidFill>
-                <a:latin typeface="Calibri"/>
-                <a:cs typeface="Calibri"/>
-              </a:rPr>
-              <a:t> </a:t>
-            </a:r>
-            <a:r>
-              <a:rPr sz="2550" b="0" dirty="0">
+              <a:rPr sz="2550" b="0" spc="-35" dirty="0">
+                <a:solidFill>
+                  <a:srgbClr val="383838"/>
+                </a:solidFill>
+                <a:latin typeface="Calibri"/>
+                <a:cs typeface="Calibri"/>
+              </a:rPr>
+              <a:t>samom</a:t>
+            </a:r>
+            <a:r>
+              <a:rPr sz="2550" b="0" spc="30" dirty="0">
+                <a:solidFill>
+                  <a:srgbClr val="383838"/>
+                </a:solidFill>
+                <a:latin typeface="Calibri"/>
+                <a:cs typeface="Calibri"/>
+              </a:rPr>
+              <a:t> </a:t>
+            </a:r>
+            <a:r>
+              <a:rPr sz="2550" b="0" spc="-10" dirty="0">
+                <a:solidFill>
+                  <a:srgbClr val="2D2D2D"/>
+                </a:solidFill>
+                <a:latin typeface="Calibri"/>
+                <a:cs typeface="Calibri"/>
+              </a:rPr>
+              <a:t>indeksu, </a:t>
+            </a:r>
+            <a:r>
+              <a:rPr sz="2550" b="0" dirty="0" err="1">
                 <a:solidFill>
                   <a:srgbClr val="2F2F2F"/>
                 </a:solidFill>
                 <a:latin typeface="Calibri"/>
                 <a:cs typeface="Calibri"/>
               </a:rPr>
-              <a:t>prisutni</a:t>
-            </a:r>
-            <a:r>
-              <a:rPr sz="2550" b="0" spc="-70" dirty="0">
+              <a:t>koriste</a:t>
+            </a:r>
+            <a:r>
+              <a:rPr lang="sr-Latn-RS" sz="2550" b="0" dirty="0">
                 <a:solidFill>
                   <a:srgbClr val="2F2F2F"/>
                 </a:solidFill>
                 <a:latin typeface="Calibri"/>
                 <a:cs typeface="Calibri"/>
               </a:rPr>
-              <a:t> </a:t>
-            </a:r>
-            <a:r>
-              <a:rPr sz="2550" b="0" spc="90" dirty="0">
-                <a:solidFill>
-                  <a:srgbClr val="363636"/>
-                </a:solidFill>
-                <a:latin typeface="Calibri"/>
-                <a:cs typeface="Calibri"/>
-              </a:rPr>
-              <a:t>u</a:t>
-            </a:r>
-            <a:r>
-              <a:rPr sz="2550" b="0" spc="-145" dirty="0">
-                <a:solidFill>
-                  <a:srgbClr val="363636"/>
-                </a:solidFill>
-                <a:latin typeface="Calibri"/>
-                <a:cs typeface="Calibri"/>
-              </a:rPr>
-              <a:t> </a:t>
-            </a:r>
-            <a:r>
-              <a:rPr sz="2550" b="0" spc="-35" dirty="0">
-                <a:solidFill>
-                  <a:srgbClr val="383838"/>
-                </a:solidFill>
-                <a:latin typeface="Calibri"/>
-                <a:cs typeface="Calibri"/>
-              </a:rPr>
-              <a:t>samom</a:t>
-            </a:r>
-            <a:r>
-              <a:rPr sz="2550" b="0" spc="30" dirty="0">
-                <a:solidFill>
-                  <a:srgbClr val="383838"/>
-                </a:solidFill>
-                <a:latin typeface="Calibri"/>
-                <a:cs typeface="Calibri"/>
-              </a:rPr>
-              <a:t> </a:t>
-            </a:r>
-            <a:r>
-              <a:rPr sz="2550" b="0" spc="-10" dirty="0">
-                <a:solidFill>
-                  <a:srgbClr val="2D2D2D"/>
-                </a:solidFill>
-                <a:latin typeface="Calibri"/>
-                <a:cs typeface="Calibri"/>
-              </a:rPr>
-              <a:t>indeksu, </a:t>
-            </a:r>
-            <a:r>
-              <a:rPr sz="2550" b="0" dirty="0">
+              <a:t>ć</a:t>
+            </a:r>
+            <a:r>
+              <a:rPr sz="2550" b="0" dirty="0" err="1">
                 <a:solidFill>
                   <a:srgbClr val="2F2F2F"/>
                 </a:solidFill>
                 <a:latin typeface="Calibri"/>
                 <a:cs typeface="Calibri"/>
               </a:rPr>
-              <a:t>koristeči</a:t>
+              <a:t>i</a:t>
             </a:r>
             <a:r>
               <a:rPr sz="2550" b="0" spc="25" dirty="0">
@@ -14718,7 +14748,27 @@
                 <a:latin typeface="Calibri"/>
                 <a:cs typeface="Calibri"/>
               </a:rPr>
-              <a:t>omogučavaju</a:t>
+              <a:t>omogu</a:t>
+            </a:r>
+            <a:r>
+              <a:rPr lang="sr-Latn-RS" sz="2550" spc="-10" dirty="0">
+                <a:solidFill>
+                  <a:srgbClr val="282828"/>
+                </a:solidFill>
+                <a:latin typeface="Calibri"/>
+                <a:cs typeface="Calibri"/>
+              </a:rPr>
+              <a:t>ć</a:t>
+            </a:r>
+            <a:r>
+              <a:rPr sz="2550" spc="-10" dirty="0" err="1">
+                <a:solidFill>
+                  <a:srgbClr val="282828"/>
+                </a:solidFill>
+                <a:latin typeface="Calibri"/>
+                <a:cs typeface="Calibri"/>
+              </a:rPr>
+              <a:t>avaju</a:t>
             </a:r>
             <a:r>
               <a:rPr lang="sr-Latn-RS" sz="2550" spc="-10" dirty="0">
@@ -14772,6 +14822,26 @@
               <a:t> </a:t>
             </a:r>
             <a:r>
+              <a:rPr sz="2550" spc="-10" dirty="0" err="1">
+                <a:solidFill>
+                  <a:srgbClr val="383838"/>
+                </a:solidFill>
+                <a:latin typeface="Calibri"/>
+                <a:cs typeface="Calibri"/>
+              </a:rPr>
+              <a:t>sekvenci</a:t>
+            </a:r>
+            <a:r>
+              <a:rPr lang="sr-Latn-RS" sz="2550" spc="-10" dirty="0">
+                <a:solidFill>
+                  <a:srgbClr val="383838"/>
+                </a:solidFill>
+                <a:latin typeface="Calibri"/>
+                <a:cs typeface="Calibri"/>
+              </a:rPr>
+              <a:t>jalno</a:t>
+            </a:r>
+            <a:r>
               <a:rPr sz="2550" spc="-10" dirty="0">
                 <a:solidFill>
                   <a:srgbClr val="383838"/>
@@ -14779,7 +14849,7 @@
                 <a:latin typeface="Calibri"/>
                 <a:cs typeface="Calibri"/>
               </a:rPr>
-              <a:t>sekvencionalno </a:t>
+              <a:t> </a:t>
             </a:r>
             <a:r>
               <a:rPr sz="2550" spc="-10" dirty="0" err="1">
@@ -16148,7 +16218,7 @@
               <a:t> </a:t>
             </a:r>
             <a:r>
-              <a:rPr sz="2550" dirty="0">
+              <a:rPr sz="2550" dirty="0" err="1">
                 <a:solidFill>
                   <a:schemeClr val="tx1">
                     <a:lumMod val="75000"/>
@@ -16174,17 +16244,30 @@
               <a:t> </a:t>
             </a:r>
             <a:r>
-              <a:rPr sz="2550" dirty="0">
-                <a:solidFill>
-                  <a:schemeClr val="tx1">
-                    <a:lumMod val="75000"/>
-                    <a:lumOff val="25000"/>
-                  </a:schemeClr>
-                </a:solidFill>
-                <a:latin typeface="Calibri"/>
-                <a:cs typeface="Calibri"/>
-              </a:rPr>
-              <a:t>več</a:t>
+              <a:rPr sz="2550" dirty="0" err="1">
+                <a:solidFill>
+                  <a:schemeClr val="tx1">
+                    <a:lumMod val="75000"/>
+                    <a:lumOff val="25000"/>
+                  </a:schemeClr>
+                </a:solidFill>
+                <a:latin typeface="Calibri"/>
+                <a:cs typeface="Calibri"/>
+              </a:rPr>
+              <a:t>ve</a:t>
+            </a:r>
+            <a:r>
+              <a:rPr lang="sr-Latn-RS" sz="2550" dirty="0">
+                <a:solidFill>
+                  <a:schemeClr val="tx1">
+                    <a:lumMod val="75000"/>
+                    <a:lumOff val="25000"/>
+                  </a:schemeClr>
+                </a:solidFill>
+                <a:latin typeface="Calibri"/>
+                <a:cs typeface="Calibri"/>
+              </a:rPr>
+              <a:t>ć</a:t>
             </a:r>
             <a:r>
               <a:rPr sz="2550" spc="-80" dirty="0">
@@ -16260,7 +16343,7 @@
         <p:spPr>
           <a:xfrm>
             <a:off x="1472867" y="6824133"/>
-            <a:ext cx="7842884" cy="2058035"/>
+            <a:ext cx="7842884" cy="1205971"/>
           </a:xfrm>
           <a:prstGeom prst="rect">
             <a:avLst/>
@@ -16281,14 +16364,34 @@
               </a:spcBef>
             </a:pPr>
             <a:r>
-              <a:rPr sz="3700" b="1" spc="-140" dirty="0">
+              <a:rPr sz="3700" b="1" spc="-140" dirty="0" err="1">
                 <a:solidFill>
                   <a:srgbClr val="004F87"/>
                 </a:solidFill>
                 <a:latin typeface="Cambria"/>
                 <a:cs typeface="Cambria"/>
               </a:rPr>
-              <a:t>Pokrivajuči</a:t>
+              <a:t>Pokrivaju</a:t>
+            </a:r>
+            <a:r>
+              <a:rPr lang="sr-Latn-RS" sz="3700" b="1" spc="-140" dirty="0">
+                <a:solidFill>
+                  <a:srgbClr val="004F87"/>
+                </a:solidFill>
+                <a:latin typeface="Cambria"/>
+                <a:cs typeface="Cambria"/>
+              </a:rPr>
+              <a:t>ć</a:t>
+            </a:r>
+            <a:r>
+              <a:rPr sz="3700" b="1" spc="-140" dirty="0" err="1">
+                <a:solidFill>
+                  <a:srgbClr val="004F87"/>
+                </a:solidFill>
+                <a:latin typeface="Cambria"/>
+                <a:cs typeface="Cambria"/>
+              </a:rPr>
+              <a:t>i</a:t>
             </a:r>
             <a:r>
               <a:rPr sz="3700" b="1" dirty="0">
@@ -16485,6 +16588,16 @@
               <a:t> </a:t>
             </a:r>
             <a:r>
+              <a:rPr sz="2550" dirty="0" err="1">
+                <a:solidFill>
+                  <a:srgbClr val="343434"/>
+                </a:solidFill>
+                <a:latin typeface="Calibri"/>
+                <a:cs typeface="Calibri"/>
+              </a:rPr>
+              <a:t>traži</a:t>
+            </a:r>
+            <a:r>
               <a:rPr sz="2550" dirty="0">
                 <a:solidFill>
                   <a:srgbClr val="343434"/>
@@ -16492,337 +16605,7 @@
                 <a:latin typeface="Calibri"/>
                 <a:cs typeface="Calibri"/>
               </a:rPr>
-              <a:t>traži.</a:t>
-            </a:r>
-            <a:r>
-              <a:rPr sz="2550" spc="-120" dirty="0">
-                <a:solidFill>
-                  <a:srgbClr val="343434"/>
-                </a:solidFill>
-                <a:latin typeface="Calibri"/>
-                <a:cs typeface="Calibri"/>
-              </a:rPr>
-              <a:t> </a:t>
-            </a:r>
-            <a:r>
-              <a:rPr sz="2550" spc="70" dirty="0">
-                <a:solidFill>
-                  <a:srgbClr val="3A3A3A"/>
-                </a:solidFill>
-                <a:latin typeface="Calibri"/>
-                <a:cs typeface="Calibri"/>
-              </a:rPr>
-              <a:t>Od</a:t>
-            </a:r>
-            <a:r>
-              <a:rPr sz="2550" spc="-70" dirty="0">
-                <a:solidFill>
-                  <a:srgbClr val="3A3A3A"/>
-                </a:solidFill>
-                <a:latin typeface="Calibri"/>
-                <a:cs typeface="Calibri"/>
-              </a:rPr>
-              <a:t> </a:t>
-            </a:r>
-            <a:r>
-              <a:rPr sz="2550" spc="70" dirty="0">
-                <a:solidFill>
-                  <a:srgbClr val="343434"/>
-                </a:solidFill>
-                <a:latin typeface="Calibri"/>
-                <a:cs typeface="Calibri"/>
-              </a:rPr>
-              <a:t>v11</a:t>
-            </a:r>
-            <a:r>
-              <a:rPr sz="2550" spc="-90" dirty="0">
-                <a:solidFill>
-                  <a:srgbClr val="343434"/>
-                </a:solidFill>
-                <a:latin typeface="Calibri"/>
-                <a:cs typeface="Calibri"/>
-              </a:rPr>
-              <a:t> </a:t>
-            </a:r>
-            <a:r>
-              <a:rPr sz="2550" spc="-10" dirty="0">
-                <a:solidFill>
-                  <a:srgbClr val="2F2F2F"/>
-                </a:solidFill>
-                <a:latin typeface="Calibri"/>
-                <a:cs typeface="Calibri"/>
-              </a:rPr>
-              <a:t>moguče </a:t>
-            </a:r>
-            <a:r>
-              <a:rPr sz="2550" spc="-20" dirty="0">
-                <a:solidFill>
-                  <a:srgbClr val="2D2D2D"/>
-                </a:solidFill>
-                <a:latin typeface="Calibri"/>
-                <a:cs typeface="Calibri"/>
-              </a:rPr>
-              <a:t>je</a:t>
-            </a:r>
-            <a:r>
-              <a:rPr sz="2550" spc="-170" dirty="0">
-                <a:solidFill>
-                  <a:srgbClr val="2D2D2D"/>
-                </a:solidFill>
-                <a:latin typeface="Calibri"/>
-                <a:cs typeface="Calibri"/>
-              </a:rPr>
-              <a:t> </a:t>
-            </a:r>
-            <a:r>
-              <a:rPr sz="2550" dirty="0">
-                <a:solidFill>
-                  <a:srgbClr val="343434"/>
-                </a:solidFill>
-                <a:latin typeface="Calibri"/>
-                <a:cs typeface="Calibri"/>
-              </a:rPr>
-              <a:t>koristiti</a:t>
-            </a:r>
-            <a:r>
-              <a:rPr sz="2550" spc="30" dirty="0">
-                <a:solidFill>
-                  <a:srgbClr val="343434"/>
-                </a:solidFill>
-                <a:latin typeface="Calibri"/>
-                <a:cs typeface="Calibri"/>
-              </a:rPr>
-              <a:t> </a:t>
-            </a:r>
-            <a:r>
-              <a:rPr sz="2550" b="1" spc="100" dirty="0">
-                <a:solidFill>
-                  <a:srgbClr val="2F2F2F"/>
-                </a:solidFill>
-                <a:latin typeface="Calibri"/>
-                <a:cs typeface="Calibri"/>
-              </a:rPr>
-              <a:t>INCLUDE</a:t>
-            </a:r>
-            <a:r>
-              <a:rPr sz="2550" b="1" spc="-60" dirty="0">
-                <a:solidFill>
-                  <a:srgbClr val="2F2F2F"/>
-                </a:solidFill>
-                <a:latin typeface="Calibri"/>
-                <a:cs typeface="Calibri"/>
-              </a:rPr>
-              <a:t> </a:t>
-            </a:r>
-            <a:r>
-              <a:rPr sz="2550" dirty="0">
-                <a:solidFill>
-                  <a:srgbClr val="2A2A2A"/>
-                </a:solidFill>
-                <a:latin typeface="Calibri"/>
-                <a:cs typeface="Calibri"/>
-              </a:rPr>
-              <a:t>klauzulu</a:t>
-            </a:r>
-            <a:r>
-              <a:rPr sz="2550" spc="-10" dirty="0">
-                <a:solidFill>
-                  <a:srgbClr val="2A2A2A"/>
-                </a:solidFill>
-                <a:latin typeface="Calibri"/>
-                <a:cs typeface="Calibri"/>
-              </a:rPr>
-              <a:t> </a:t>
-            </a:r>
-            <a:r>
-              <a:rPr sz="2550" dirty="0">
-                <a:solidFill>
-                  <a:srgbClr val="343434"/>
-                </a:solidFill>
-                <a:latin typeface="Calibri"/>
-                <a:cs typeface="Calibri"/>
-              </a:rPr>
-              <a:t>koja</a:t>
-            </a:r>
-            <a:r>
-              <a:rPr sz="2550" spc="-80" dirty="0">
-                <a:solidFill>
-                  <a:srgbClr val="343434"/>
-                </a:solidFill>
-                <a:latin typeface="Calibri"/>
-                <a:cs typeface="Calibri"/>
-              </a:rPr>
-              <a:t> </a:t>
-            </a:r>
-            <a:r>
-              <a:rPr sz="2550" dirty="0">
-                <a:solidFill>
-                  <a:srgbClr val="2D2D2D"/>
-                </a:solidFill>
-                <a:latin typeface="Calibri"/>
-                <a:cs typeface="Calibri"/>
-              </a:rPr>
-              <a:t>dodaje</a:t>
-            </a:r>
-            <a:r>
-              <a:rPr sz="2550" spc="-35" dirty="0">
-                <a:solidFill>
-                  <a:srgbClr val="2D2D2D"/>
-                </a:solidFill>
-                <a:latin typeface="Calibri"/>
-                <a:cs typeface="Calibri"/>
-              </a:rPr>
-              <a:t> </a:t>
-            </a:r>
-            <a:r>
-              <a:rPr sz="2550" spc="-10" dirty="0">
-                <a:solidFill>
-                  <a:srgbClr val="343434"/>
-                </a:solidFill>
-                <a:latin typeface="Calibri"/>
-                <a:cs typeface="Calibri"/>
-              </a:rPr>
-              <a:t>kolone</a:t>
-            </a:r>
-            <a:r>
-              <a:rPr sz="2550" spc="-65" dirty="0">
-                <a:solidFill>
-                  <a:srgbClr val="343434"/>
-                </a:solidFill>
-                <a:latin typeface="Calibri"/>
-                <a:cs typeface="Calibri"/>
-              </a:rPr>
-              <a:t> </a:t>
-            </a:r>
-            <a:r>
-              <a:rPr sz="2550" spc="90" dirty="0">
-                <a:solidFill>
-                  <a:srgbClr val="333333"/>
-                </a:solidFill>
-                <a:latin typeface="Calibri"/>
-                <a:cs typeface="Calibri"/>
-              </a:rPr>
-              <a:t>u</a:t>
-            </a:r>
-            <a:r>
-              <a:rPr sz="2550" spc="-100" dirty="0">
-                <a:solidFill>
-                  <a:srgbClr val="333333"/>
-                </a:solidFill>
-                <a:latin typeface="Calibri"/>
-                <a:cs typeface="Calibri"/>
-              </a:rPr>
-              <a:t> </a:t>
-            </a:r>
-            <a:r>
-              <a:rPr sz="2550" spc="-10" dirty="0">
-                <a:solidFill>
-                  <a:srgbClr val="2F2F2F"/>
-                </a:solidFill>
-                <a:latin typeface="Calibri"/>
-                <a:cs typeface="Calibri"/>
-              </a:rPr>
-              <a:t>listove </a:t>
-            </a:r>
-            <a:r>
-              <a:rPr sz="2550" dirty="0">
-                <a:solidFill>
-                  <a:srgbClr val="313131"/>
-                </a:solidFill>
-                <a:latin typeface="Calibri"/>
-                <a:cs typeface="Calibri"/>
-              </a:rPr>
-              <a:t>bez</a:t>
-            </a:r>
-            <a:r>
-              <a:rPr sz="2550" spc="25" dirty="0">
-                <a:solidFill>
-                  <a:srgbClr val="313131"/>
-                </a:solidFill>
-                <a:latin typeface="Calibri"/>
-                <a:cs typeface="Calibri"/>
-              </a:rPr>
-              <a:t> </a:t>
-            </a:r>
-            <a:r>
-              <a:rPr sz="2550" dirty="0">
-                <a:solidFill>
-                  <a:srgbClr val="313131"/>
-                </a:solidFill>
-                <a:latin typeface="Calibri"/>
-                <a:cs typeface="Calibri"/>
-              </a:rPr>
-              <a:t>uticaja</a:t>
-            </a:r>
-            <a:r>
-              <a:rPr sz="2550" spc="-35" dirty="0">
-                <a:solidFill>
-                  <a:srgbClr val="313131"/>
-                </a:solidFill>
-                <a:latin typeface="Calibri"/>
-                <a:cs typeface="Calibri"/>
-              </a:rPr>
-              <a:t> </a:t>
-            </a:r>
-            <a:r>
-              <a:rPr sz="2550" dirty="0">
-                <a:solidFill>
-                  <a:srgbClr val="3D3D3D"/>
-                </a:solidFill>
-                <a:latin typeface="Calibri"/>
-                <a:cs typeface="Calibri"/>
-              </a:rPr>
-              <a:t>na</a:t>
-            </a:r>
-            <a:r>
-              <a:rPr sz="2550" spc="5" dirty="0">
-                <a:solidFill>
-                  <a:srgbClr val="3D3D3D"/>
-                </a:solidFill>
-                <a:latin typeface="Calibri"/>
-                <a:cs typeface="Calibri"/>
-              </a:rPr>
-              <a:t> </a:t>
-            </a:r>
-            <a:r>
-              <a:rPr sz="2550" dirty="0">
-                <a:solidFill>
-                  <a:srgbClr val="313131"/>
-                </a:solidFill>
-                <a:latin typeface="Calibri"/>
-                <a:cs typeface="Calibri"/>
-              </a:rPr>
-              <a:t>ključ</a:t>
-            </a:r>
-            <a:r>
-              <a:rPr sz="2550" spc="-15" dirty="0">
-                <a:solidFill>
-                  <a:srgbClr val="313131"/>
-                </a:solidFill>
-                <a:latin typeface="Calibri"/>
-                <a:cs typeface="Calibri"/>
-              </a:rPr>
-              <a:t> </a:t>
-            </a:r>
-            <a:r>
-              <a:rPr sz="2550" dirty="0">
-                <a:solidFill>
-                  <a:srgbClr val="2A3F59"/>
-                </a:solidFill>
-                <a:latin typeface="Calibri"/>
-                <a:cs typeface="Calibri"/>
-              </a:rPr>
-              <a:t>i </a:t>
-            </a:r>
-            <a:r>
-              <a:rPr sz="2550" spc="-10" dirty="0">
-                <a:solidFill>
-                  <a:srgbClr val="363636"/>
-                </a:solidFill>
-                <a:latin typeface="Calibri"/>
-                <a:cs typeface="Calibri"/>
-              </a:rPr>
-              <a:t>sortiranje.</a:t>
+              <a:t>.</a:t>
             </a:r>
             <a:endParaRPr sz="2550" dirty="0">
               <a:latin typeface="Calibri"/>
@@ -17153,7 +16936,7 @@
               <a:buChar char="•"/>
             </a:pPr>
             <a:r>
-              <a:rPr lang="sr-Latn-RS" sz="2550" spc="95" dirty="0">
+              <a:rPr lang="sr-Latn-RS" sz="2550" dirty="0">
                 <a:solidFill>
                   <a:srgbClr val="363636"/>
                 </a:solidFill>
@@ -17163,7 +16946,7 @@
               <a:t>I pored pokrivajućeg indeksa, PostgreSQL ponekad ipak mora da proveri heap. Razlog leži u MVCC (Multi-Version Concurrency Control) mehanizmu koji PostgreSQL koristi za </a:t>
             </a:r>
             <a:r>
-              <a:rPr lang="sr-Latn-RS" sz="2550" spc="95" dirty="0">
+              <a:rPr lang="sr-Latn-RS" sz="2550" dirty="0">
                 <a:solidFill>
                   <a:schemeClr val="tx1">
                     <a:lumMod val="75000"/>
@@ -17176,7 +16959,7 @@
               <a:t>upravljanje</a:t>
             </a:r>
             <a:r>
-              <a:rPr lang="sr-Latn-RS" sz="2550" spc="95" dirty="0">
+              <a:rPr lang="sr-Latn-RS" sz="2550" dirty="0">
                 <a:solidFill>
                   <a:srgbClr val="363636"/>
                 </a:solidFill>
@@ -17185,7 +16968,7 @@
               </a:rPr>
               <a:t> istovremenošću transakcija.</a:t>
             </a:r>
-            <a:endParaRPr lang="en-US" sz="2550" spc="95" dirty="0">
+            <a:endParaRPr lang="en-US" sz="2550" dirty="0">
               <a:solidFill>
                 <a:srgbClr val="363636"/>
               </a:solidFill>
@@ -18000,7 +17783,7 @@
                 <a:latin typeface="Calibri"/>
                 <a:cs typeface="Calibri"/>
               </a:rPr>
-              <a:t>bite</a:t>
+              <a:t>bitove</a:t>
             </a:r>
             <a:r>
               <a:rPr lang="sr-Latn-RS" sz="2550" spc="-65" dirty="0">
@@ -18521,6 +18304,16 @@
                 <a:cs typeface="Calibri"/>
               </a:rPr>
               <a:t>operacije</a:t>
+            </a:r>
+            <a:r>
+              <a:rPr lang="sr-Latn-RS" sz="2550" spc="-10" dirty="0">
+                <a:solidFill>
+                  <a:srgbClr val="343434"/>
+                </a:solidFill>
+                <a:latin typeface="Calibri"/>
+                <a:cs typeface="Calibri"/>
+              </a:rPr>
+              <a:t>.</a:t>
             </a:r>
             <a:endParaRPr lang="sr-Latn-RS" sz="2550" dirty="0">
               <a:latin typeface="Calibri"/>
@@ -19546,7 +19339,7 @@
         <p:spPr>
           <a:xfrm>
             <a:off x="7197425" y="3545703"/>
-            <a:ext cx="5654675" cy="4413885"/>
+            <a:ext cx="5654675" cy="3608295"/>
           </a:xfrm>
           <a:prstGeom prst="rect">
             <a:avLst/>
@@ -19967,24 +19760,44 @@
               <a:t> </a:t>
             </a:r>
             <a:r>
+              <a:rPr sz="2550" spc="-10" dirty="0" err="1">
+                <a:solidFill>
+                  <a:srgbClr val="363636"/>
+                </a:solidFill>
+                <a:latin typeface="Calibri"/>
+                <a:cs typeface="Calibri"/>
+              </a:rPr>
+              <a:t>sve</a:t>
+            </a:r>
+            <a:r>
+              <a:rPr sz="2550" spc="-140" dirty="0">
+                <a:solidFill>
+                  <a:srgbClr val="363636"/>
+                </a:solidFill>
+                <a:latin typeface="Calibri"/>
+                <a:cs typeface="Calibri"/>
+              </a:rPr>
+              <a:t> </a:t>
+            </a:r>
+            <a:r>
               <a:rPr sz="2550" spc="-10" dirty="0">
                 <a:solidFill>
-                  <a:srgbClr val="363636"/>
-                </a:solidFill>
-                <a:latin typeface="Calibri"/>
-                <a:cs typeface="Calibri"/>
-              </a:rPr>
-              <a:t>sve</a:t>
-            </a:r>
-            <a:r>
-              <a:rPr sz="2550" spc="-140" dirty="0">
-                <a:solidFill>
-                  <a:srgbClr val="363636"/>
-                </a:solidFill>
-                <a:latin typeface="Calibri"/>
-                <a:cs typeface="Calibri"/>
-              </a:rPr>
-              <a:t> </a:t>
+                  <a:srgbClr val="2D2D2D"/>
+                </a:solidFill>
+                <a:latin typeface="Calibri"/>
+                <a:cs typeface="Calibri"/>
+              </a:rPr>
+              <a:t>fil</a:t>
+            </a:r>
+            <a:r>
+              <a:rPr lang="sr-Latn-RS" sz="2550" spc="-10" dirty="0">
+                <a:solidFill>
+                  <a:srgbClr val="2D2D2D"/>
+                </a:solidFill>
+                <a:latin typeface="Calibri"/>
+                <a:cs typeface="Calibri"/>
+              </a:rPr>
+              <a:t>e</a:t>
             </a:r>
             <a:r>
               <a:rPr sz="2550" spc="-10" dirty="0">
@@ -19994,7 +19807,7 @@
                 <a:latin typeface="Calibri"/>
                 <a:cs typeface="Calibri"/>
               </a:rPr>
-              <a:t>filtre.</a:t>
+              <a:t>re.</a:t>
             </a:r>
             <a:endParaRPr sz="2550" dirty="0">
               <a:latin typeface="Calibri"/>
@@ -20208,6 +20021,26 @@
               </a:spcBef>
             </a:pPr>
             <a:r>
+              <a:rPr sz="2550" dirty="0" err="1">
+                <a:solidFill>
+                  <a:srgbClr val="262626"/>
+                </a:solidFill>
+                <a:latin typeface="Calibri"/>
+                <a:cs typeface="Calibri"/>
+              </a:rPr>
+              <a:t>rezultuju</a:t>
+            </a:r>
+            <a:r>
+              <a:rPr lang="sr-Latn-RS" sz="2550" dirty="0">
+                <a:solidFill>
+                  <a:srgbClr val="262626"/>
+                </a:solidFill>
+                <a:latin typeface="Calibri"/>
+                <a:cs typeface="Calibri"/>
+              </a:rPr>
+              <a:t>ć</a:t>
+            </a:r>
+            <a:r>
               <a:rPr sz="2550" dirty="0">
                 <a:solidFill>
                   <a:srgbClr val="262626"/>
@@ -20215,7 +20048,7 @@
                 <a:latin typeface="Calibri"/>
                 <a:cs typeface="Calibri"/>
               </a:rPr>
-              <a:t>rezultujuče</a:t>
+              <a:t>e</a:t>
             </a:r>
             <a:r>
               <a:rPr sz="2550" spc="-20" dirty="0">
@@ -20861,799 +20694,6 @@
       </p:sp>
       <p:sp>
         <p:nvSpPr>
-          <p:cNvPr id="7" name="object 7"/>
-          <p:cNvSpPr txBox="1"/>
-          <p:nvPr/>
-        </p:nvSpPr>
-        <p:spPr>
-          <a:xfrm>
-            <a:off x="10576977" y="4284322"/>
-            <a:ext cx="7631430" cy="3963035"/>
-          </a:xfrm>
-          <a:prstGeom prst="rect">
-            <a:avLst/>
-          </a:prstGeom>
-        </p:spPr>
-        <p:txBody>
-          <a:bodyPr vert="horz" wrap="square" lIns="0" tIns="349885" rIns="0" bIns="0" rtlCol="0">
-            <a:spAutoFit/>
-          </a:bodyPr>
-          <a:lstStyle/>
-          <a:p>
-            <a:pPr marL="12700">
-              <a:lnSpc>
-                <a:spcPct val="100000"/>
-              </a:lnSpc>
-              <a:spcBef>
-                <a:spcPts val="2755"/>
-              </a:spcBef>
-            </a:pPr>
-            <a:r>
-              <a:rPr sz="3700" b="1" dirty="0">
-                <a:solidFill>
-                  <a:srgbClr val="004F85"/>
-                </a:solidFill>
-                <a:latin typeface="Cambria"/>
-                <a:cs typeface="Cambria"/>
-              </a:rPr>
-              <a:t>Donošenje</a:t>
-            </a:r>
-            <a:r>
-              <a:rPr sz="3700" b="1" spc="130" dirty="0">
-                <a:solidFill>
-                  <a:srgbClr val="004F85"/>
-                </a:solidFill>
-                <a:latin typeface="Cambria"/>
-                <a:cs typeface="Cambria"/>
-              </a:rPr>
-              <a:t> </a:t>
-            </a:r>
-            <a:r>
-              <a:rPr sz="3700" b="1" spc="-10" dirty="0">
-                <a:solidFill>
-                  <a:srgbClr val="004679"/>
-                </a:solidFill>
-                <a:latin typeface="Cambria"/>
-                <a:cs typeface="Cambria"/>
-              </a:rPr>
-              <a:t>odluka</a:t>
-            </a:r>
-            <a:endParaRPr sz="3700" b="1" dirty="0">
-              <a:latin typeface="Cambria"/>
-              <a:cs typeface="Cambria"/>
-            </a:endParaRPr>
-          </a:p>
-          <a:p>
-            <a:pPr marL="15875" marR="5080" indent="8890">
-              <a:lnSpc>
-                <a:spcPct val="109100"/>
-              </a:lnSpc>
-              <a:spcBef>
-                <a:spcPts val="1565"/>
-              </a:spcBef>
-            </a:pPr>
-            <a:r>
-              <a:rPr sz="2550" dirty="0">
-                <a:solidFill>
-                  <a:srgbClr val="383838"/>
-                </a:solidFill>
-                <a:latin typeface="Calibri"/>
-                <a:cs typeface="Calibri"/>
-              </a:rPr>
-              <a:t>CBO</a:t>
-            </a:r>
-            <a:r>
-              <a:rPr sz="2550" spc="270" dirty="0">
-                <a:solidFill>
-                  <a:srgbClr val="383838"/>
-                </a:solidFill>
-                <a:latin typeface="Calibri"/>
-                <a:cs typeface="Calibri"/>
-              </a:rPr>
-              <a:t> </a:t>
-            </a:r>
-            <a:r>
-              <a:rPr sz="2550" spc="-10" dirty="0">
-                <a:solidFill>
-                  <a:srgbClr val="282828"/>
-                </a:solidFill>
-                <a:latin typeface="Calibri"/>
-                <a:cs typeface="Calibri"/>
-              </a:rPr>
-              <a:t>procenjuje</a:t>
-            </a:r>
-            <a:r>
-              <a:rPr sz="2550" spc="-35" dirty="0">
-                <a:solidFill>
-                  <a:srgbClr val="282828"/>
-                </a:solidFill>
-                <a:latin typeface="Calibri"/>
-                <a:cs typeface="Calibri"/>
-              </a:rPr>
-              <a:t> </a:t>
-            </a:r>
-            <a:r>
-              <a:rPr sz="2550" dirty="0">
-                <a:solidFill>
-                  <a:srgbClr val="2F2F2F"/>
-                </a:solidFill>
-                <a:latin typeface="Calibri"/>
-                <a:cs typeface="Calibri"/>
-              </a:rPr>
-              <a:t>numerički</a:t>
-            </a:r>
-            <a:r>
-              <a:rPr sz="2550" spc="100" dirty="0">
-                <a:solidFill>
-                  <a:srgbClr val="2F2F2F"/>
-                </a:solidFill>
-                <a:latin typeface="Calibri"/>
-                <a:cs typeface="Calibri"/>
-              </a:rPr>
-              <a:t> </a:t>
-            </a:r>
-            <a:r>
-              <a:rPr sz="2550" dirty="0">
-                <a:solidFill>
-                  <a:srgbClr val="2F2F2F"/>
-                </a:solidFill>
-                <a:latin typeface="Calibri"/>
-                <a:cs typeface="Calibri"/>
-              </a:rPr>
-              <a:t>trošak</a:t>
-            </a:r>
-            <a:r>
-              <a:rPr sz="2550" spc="10" dirty="0">
-                <a:solidFill>
-                  <a:srgbClr val="2F2F2F"/>
-                </a:solidFill>
-                <a:latin typeface="Calibri"/>
-                <a:cs typeface="Calibri"/>
-              </a:rPr>
-              <a:t> </a:t>
-            </a:r>
-            <a:r>
-              <a:rPr sz="2550" dirty="0">
-                <a:solidFill>
-                  <a:srgbClr val="333333"/>
-                </a:solidFill>
-                <a:latin typeface="Calibri"/>
-                <a:cs typeface="Calibri"/>
-              </a:rPr>
-              <a:t>svakog</a:t>
-            </a:r>
-            <a:r>
-              <a:rPr sz="2550" spc="-10" dirty="0">
-                <a:solidFill>
-                  <a:srgbClr val="333333"/>
-                </a:solidFill>
-                <a:latin typeface="Calibri"/>
-                <a:cs typeface="Calibri"/>
-              </a:rPr>
-              <a:t> </a:t>
-            </a:r>
-            <a:r>
-              <a:rPr sz="2550" spc="-10" dirty="0">
-                <a:solidFill>
-                  <a:srgbClr val="343434"/>
-                </a:solidFill>
-                <a:latin typeface="Calibri"/>
-                <a:cs typeface="Calibri"/>
-              </a:rPr>
-              <a:t>plana</a:t>
-            </a:r>
-            <a:r>
-              <a:rPr sz="2550" spc="-40" dirty="0">
-                <a:solidFill>
-                  <a:srgbClr val="343434"/>
-                </a:solidFill>
-                <a:latin typeface="Calibri"/>
-                <a:cs typeface="Calibri"/>
-              </a:rPr>
-              <a:t> </a:t>
-            </a:r>
-            <a:r>
-              <a:rPr sz="2550" dirty="0">
-                <a:solidFill>
-                  <a:srgbClr val="262626"/>
-                </a:solidFill>
-                <a:latin typeface="Calibri"/>
-                <a:cs typeface="Calibri"/>
-              </a:rPr>
-              <a:t>na</a:t>
-            </a:r>
-            <a:r>
-              <a:rPr sz="2550" spc="-110" dirty="0">
-                <a:solidFill>
-                  <a:srgbClr val="262626"/>
-                </a:solidFill>
-                <a:latin typeface="Calibri"/>
-                <a:cs typeface="Calibri"/>
-              </a:rPr>
-              <a:t> </a:t>
-            </a:r>
-            <a:r>
-              <a:rPr sz="2550" spc="-10" dirty="0">
-                <a:solidFill>
-                  <a:srgbClr val="212121"/>
-                </a:solidFill>
-                <a:latin typeface="Calibri"/>
-                <a:cs typeface="Calibri"/>
-              </a:rPr>
-              <a:t>osnovu </a:t>
-            </a:r>
-            <a:r>
-              <a:rPr sz="2550" dirty="0">
-                <a:solidFill>
-                  <a:srgbClr val="313131"/>
-                </a:solidFill>
-                <a:latin typeface="Calibri"/>
-                <a:cs typeface="Calibri"/>
-              </a:rPr>
-              <a:t>pg_stat1st1c</a:t>
-            </a:r>
-            <a:r>
-              <a:rPr sz="2550" spc="475" dirty="0">
-                <a:solidFill>
-                  <a:srgbClr val="313131"/>
-                </a:solidFill>
-                <a:latin typeface="Calibri"/>
-                <a:cs typeface="Calibri"/>
-              </a:rPr>
-              <a:t> </a:t>
-            </a:r>
-            <a:r>
-              <a:rPr sz="2550" spc="-10" dirty="0">
-                <a:solidFill>
-                  <a:srgbClr val="313131"/>
-                </a:solidFill>
-                <a:latin typeface="Calibri"/>
-                <a:cs typeface="Calibri"/>
-              </a:rPr>
-              <a:t>kataloga.</a:t>
-            </a:r>
-            <a:r>
-              <a:rPr sz="2550" spc="80" dirty="0">
-                <a:solidFill>
-                  <a:srgbClr val="313131"/>
-                </a:solidFill>
-                <a:latin typeface="Calibri"/>
-                <a:cs typeface="Calibri"/>
-              </a:rPr>
-              <a:t> </a:t>
-            </a:r>
-            <a:r>
-              <a:rPr sz="2550" spc="-10" dirty="0">
-                <a:solidFill>
-                  <a:srgbClr val="2D2D2D"/>
-                </a:solidFill>
-                <a:latin typeface="Calibri"/>
-                <a:cs typeface="Calibri"/>
-              </a:rPr>
-              <a:t>Statistike</a:t>
-            </a:r>
-            <a:r>
-              <a:rPr sz="2550" spc="90" dirty="0">
-                <a:solidFill>
-                  <a:srgbClr val="2D2D2D"/>
-                </a:solidFill>
-                <a:latin typeface="Calibri"/>
-                <a:cs typeface="Calibri"/>
-              </a:rPr>
-              <a:t> </a:t>
-            </a:r>
-            <a:r>
-              <a:rPr sz="2550" dirty="0">
-                <a:solidFill>
-                  <a:srgbClr val="2F2F2F"/>
-                </a:solidFill>
-                <a:latin typeface="Calibri"/>
-                <a:cs typeface="Calibri"/>
-              </a:rPr>
-              <a:t>uključuju</a:t>
-            </a:r>
-            <a:r>
-              <a:rPr sz="2550" spc="140" dirty="0">
-                <a:solidFill>
-                  <a:srgbClr val="2F2F2F"/>
-                </a:solidFill>
-                <a:latin typeface="Calibri"/>
-                <a:cs typeface="Calibri"/>
-              </a:rPr>
-              <a:t> </a:t>
-            </a:r>
-            <a:r>
-              <a:rPr sz="2550" spc="-10" dirty="0">
-                <a:solidFill>
-                  <a:srgbClr val="343434"/>
-                </a:solidFill>
-                <a:latin typeface="Calibri"/>
-                <a:cs typeface="Calibri"/>
-              </a:rPr>
-              <a:t>histograme, </a:t>
-            </a:r>
-            <a:r>
-              <a:rPr sz="2550" dirty="0">
-                <a:solidFill>
-                  <a:srgbClr val="333333"/>
-                </a:solidFill>
-                <a:latin typeface="Calibri"/>
-                <a:cs typeface="Calibri"/>
-              </a:rPr>
-              <a:t>najčešče </a:t>
-            </a:r>
-            <a:r>
-              <a:rPr sz="2550" dirty="0">
-                <a:solidFill>
-                  <a:srgbClr val="3B3B3B"/>
-                </a:solidFill>
-                <a:latin typeface="Calibri"/>
-                <a:cs typeface="Calibri"/>
-              </a:rPr>
-              <a:t>vrednosti</a:t>
-            </a:r>
-            <a:r>
-              <a:rPr sz="2550" spc="20" dirty="0">
-                <a:solidFill>
-                  <a:srgbClr val="3B3B3B"/>
-                </a:solidFill>
-                <a:latin typeface="Calibri"/>
-                <a:cs typeface="Calibri"/>
-              </a:rPr>
-              <a:t> </a:t>
-            </a:r>
-            <a:r>
-              <a:rPr sz="2550" dirty="0">
-                <a:solidFill>
-                  <a:srgbClr val="3F3F3F"/>
-                </a:solidFill>
-                <a:latin typeface="Calibri"/>
-                <a:cs typeface="Calibri"/>
-              </a:rPr>
-              <a:t>i</a:t>
-            </a:r>
-            <a:r>
-              <a:rPr sz="2550" spc="25" dirty="0">
-                <a:solidFill>
-                  <a:srgbClr val="3F3F3F"/>
-                </a:solidFill>
-                <a:latin typeface="Calibri"/>
-                <a:cs typeface="Calibri"/>
-              </a:rPr>
-              <a:t> </a:t>
-            </a:r>
-            <a:r>
-              <a:rPr sz="2550" spc="-10" dirty="0">
-                <a:solidFill>
-                  <a:srgbClr val="2D2D2D"/>
-                </a:solidFill>
-                <a:latin typeface="Calibri"/>
-                <a:cs typeface="Calibri"/>
-              </a:rPr>
-              <a:t>kardinalnost.</a:t>
-            </a:r>
-            <a:endParaRPr sz="2550" dirty="0">
-              <a:latin typeface="Calibri"/>
-              <a:cs typeface="Calibri"/>
-            </a:endParaRPr>
-          </a:p>
-          <a:p>
-            <a:pPr marL="333375" indent="-308610">
-              <a:lnSpc>
-                <a:spcPct val="100000"/>
-              </a:lnSpc>
-              <a:spcBef>
-                <a:spcPts val="3005"/>
-              </a:spcBef>
-              <a:buClr>
-                <a:srgbClr val="314157"/>
-              </a:buClr>
-              <a:buChar char="•"/>
-              <a:tabLst>
-                <a:tab pos="333375" algn="l"/>
-              </a:tabLst>
-            </a:pPr>
-            <a:r>
-              <a:rPr sz="2300" spc="-105" dirty="0">
-                <a:solidFill>
-                  <a:srgbClr val="363636"/>
-                </a:solidFill>
-                <a:latin typeface="Arial MT"/>
-                <a:cs typeface="Arial MT"/>
-              </a:rPr>
-              <a:t>Seq </a:t>
-            </a:r>
-            <a:r>
-              <a:rPr sz="2300" spc="-100" dirty="0">
-                <a:solidFill>
-                  <a:srgbClr val="383838"/>
-                </a:solidFill>
-                <a:latin typeface="Arial MT"/>
-                <a:cs typeface="Arial MT"/>
-              </a:rPr>
-              <a:t>Sean:</a:t>
-            </a:r>
-            <a:r>
-              <a:rPr sz="2300" spc="-50" dirty="0">
-                <a:solidFill>
-                  <a:srgbClr val="383838"/>
-                </a:solidFill>
-                <a:latin typeface="Arial MT"/>
-                <a:cs typeface="Arial MT"/>
-              </a:rPr>
-              <a:t> </a:t>
-            </a:r>
-            <a:r>
-              <a:rPr sz="2300" dirty="0">
-                <a:solidFill>
-                  <a:srgbClr val="2D2D2D"/>
-                </a:solidFill>
-                <a:latin typeface="Arial MT"/>
-                <a:cs typeface="Arial MT"/>
-              </a:rPr>
-              <a:t>Pobeduje</a:t>
-            </a:r>
-            <a:r>
-              <a:rPr sz="2300" spc="95" dirty="0">
-                <a:solidFill>
-                  <a:srgbClr val="2D2D2D"/>
-                </a:solidFill>
-                <a:latin typeface="Arial MT"/>
-                <a:cs typeface="Arial MT"/>
-              </a:rPr>
-              <a:t> </a:t>
-            </a:r>
-            <a:r>
-              <a:rPr sz="2300" dirty="0">
-                <a:solidFill>
-                  <a:srgbClr val="282828"/>
-                </a:solidFill>
-                <a:latin typeface="Arial MT"/>
-                <a:cs typeface="Arial MT"/>
-              </a:rPr>
-              <a:t>kod</a:t>
-            </a:r>
-            <a:r>
-              <a:rPr sz="2300" spc="-20" dirty="0">
-                <a:solidFill>
-                  <a:srgbClr val="282828"/>
-                </a:solidFill>
-                <a:latin typeface="Arial MT"/>
-                <a:cs typeface="Arial MT"/>
-              </a:rPr>
-              <a:t> </a:t>
-            </a:r>
-            <a:r>
-              <a:rPr sz="2300" spc="-25" dirty="0">
-                <a:solidFill>
-                  <a:srgbClr val="383838"/>
-                </a:solidFill>
-                <a:latin typeface="Arial MT"/>
-                <a:cs typeface="Arial MT"/>
-              </a:rPr>
-              <a:t>niske</a:t>
-            </a:r>
-            <a:r>
-              <a:rPr sz="2300" spc="-10" dirty="0">
-                <a:solidFill>
-                  <a:srgbClr val="383838"/>
-                </a:solidFill>
-                <a:latin typeface="Arial MT"/>
-                <a:cs typeface="Arial MT"/>
-              </a:rPr>
-              <a:t> </a:t>
-            </a:r>
-            <a:r>
-              <a:rPr sz="2300" dirty="0">
-                <a:solidFill>
-                  <a:srgbClr val="313131"/>
-                </a:solidFill>
-                <a:latin typeface="Arial MT"/>
-                <a:cs typeface="Arial MT"/>
-              </a:rPr>
-              <a:t>selektivnosti</a:t>
-            </a:r>
-            <a:r>
-              <a:rPr sz="2300" spc="145" dirty="0">
-                <a:solidFill>
-                  <a:srgbClr val="313131"/>
-                </a:solidFill>
-                <a:latin typeface="Arial MT"/>
-                <a:cs typeface="Arial MT"/>
-              </a:rPr>
-              <a:t> </a:t>
-            </a:r>
-            <a:r>
-              <a:rPr sz="2300" spc="-10" dirty="0">
-                <a:solidFill>
-                  <a:srgbClr val="262626"/>
-                </a:solidFill>
-                <a:latin typeface="Arial MT"/>
-                <a:cs typeface="Arial MT"/>
-              </a:rPr>
-              <a:t>(&gt;</a:t>
-            </a:r>
-            <a:r>
-              <a:rPr sz="2300" spc="-10" dirty="0">
-                <a:solidFill>
-                  <a:srgbClr val="313131"/>
-                </a:solidFill>
-                <a:latin typeface="Arial MT"/>
-                <a:cs typeface="Arial MT"/>
-              </a:rPr>
-              <a:t>30%).</a:t>
-            </a:r>
-            <a:endParaRPr sz="2300" dirty="0">
-              <a:latin typeface="Arial MT"/>
-              <a:cs typeface="Arial MT"/>
-            </a:endParaRPr>
-          </a:p>
-          <a:p>
-            <a:pPr marL="332740" indent="-307975">
-              <a:lnSpc>
-                <a:spcPct val="100000"/>
-              </a:lnSpc>
-              <a:spcBef>
-                <a:spcPts val="580"/>
-              </a:spcBef>
-              <a:buClr>
-                <a:srgbClr val="28384F"/>
-              </a:buClr>
-              <a:buChar char="•"/>
-              <a:tabLst>
-                <a:tab pos="332740" algn="l"/>
-              </a:tabLst>
-            </a:pPr>
-            <a:r>
-              <a:rPr sz="2300" dirty="0">
-                <a:solidFill>
-                  <a:srgbClr val="363636"/>
-                </a:solidFill>
-                <a:latin typeface="Arial MT"/>
-                <a:cs typeface="Arial MT"/>
-              </a:rPr>
-              <a:t>Bitmap</a:t>
-            </a:r>
-            <a:r>
-              <a:rPr sz="2300" spc="30" dirty="0">
-                <a:solidFill>
-                  <a:srgbClr val="363636"/>
-                </a:solidFill>
-                <a:latin typeface="Arial MT"/>
-                <a:cs typeface="Arial MT"/>
-              </a:rPr>
-              <a:t> </a:t>
-            </a:r>
-            <a:r>
-              <a:rPr sz="2300" spc="-80" dirty="0">
-                <a:solidFill>
-                  <a:srgbClr val="313131"/>
-                </a:solidFill>
-                <a:latin typeface="Arial MT"/>
-                <a:cs typeface="Arial MT"/>
-              </a:rPr>
-              <a:t>Scan:</a:t>
-            </a:r>
-            <a:r>
-              <a:rPr sz="2300" spc="-25" dirty="0">
-                <a:solidFill>
-                  <a:srgbClr val="313131"/>
-                </a:solidFill>
-                <a:latin typeface="Arial MT"/>
-                <a:cs typeface="Arial MT"/>
-              </a:rPr>
-              <a:t> </a:t>
-            </a:r>
-            <a:r>
-              <a:rPr sz="2300" dirty="0">
-                <a:solidFill>
-                  <a:srgbClr val="282828"/>
-                </a:solidFill>
-                <a:latin typeface="Arial MT"/>
-                <a:cs typeface="Arial MT"/>
-              </a:rPr>
-              <a:t>Optimalna</a:t>
-            </a:r>
-            <a:r>
-              <a:rPr sz="2300" spc="190" dirty="0">
-                <a:solidFill>
-                  <a:srgbClr val="282828"/>
-                </a:solidFill>
-                <a:latin typeface="Arial MT"/>
-                <a:cs typeface="Arial MT"/>
-              </a:rPr>
-              <a:t> </a:t>
-            </a:r>
-            <a:r>
-              <a:rPr sz="2300" dirty="0">
-                <a:solidFill>
-                  <a:srgbClr val="333333"/>
-                </a:solidFill>
-                <a:latin typeface="Arial MT"/>
-                <a:cs typeface="Arial MT"/>
-              </a:rPr>
-              <a:t>sredina</a:t>
-            </a:r>
-            <a:r>
-              <a:rPr sz="2300" spc="315" dirty="0">
-                <a:solidFill>
-                  <a:srgbClr val="333333"/>
-                </a:solidFill>
-                <a:latin typeface="Arial MT"/>
-                <a:cs typeface="Arial MT"/>
-              </a:rPr>
-              <a:t> </a:t>
-            </a:r>
-            <a:r>
-              <a:rPr sz="2300" spc="-10" dirty="0">
-                <a:solidFill>
-                  <a:srgbClr val="2F2F2F"/>
-                </a:solidFill>
-                <a:latin typeface="Arial MT"/>
-                <a:cs typeface="Arial MT"/>
-              </a:rPr>
-              <a:t>selektivnosti.</a:t>
-            </a:r>
-            <a:endParaRPr sz="2300" dirty="0">
-              <a:latin typeface="Arial MT"/>
-              <a:cs typeface="Arial MT"/>
-            </a:endParaRPr>
-          </a:p>
-          <a:p>
-            <a:pPr marL="334010" indent="-309245">
-              <a:lnSpc>
-                <a:spcPct val="100000"/>
-              </a:lnSpc>
-              <a:spcBef>
-                <a:spcPts val="455"/>
-              </a:spcBef>
-              <a:buClr>
-                <a:srgbClr val="334460"/>
-              </a:buClr>
-              <a:buChar char="•"/>
-              <a:tabLst>
-                <a:tab pos="334010" algn="l"/>
-              </a:tabLst>
-            </a:pPr>
-            <a:r>
-              <a:rPr sz="2300" dirty="0">
-                <a:solidFill>
-                  <a:srgbClr val="2D2D2D"/>
-                </a:solidFill>
-                <a:latin typeface="Arial MT"/>
-                <a:cs typeface="Arial MT"/>
-              </a:rPr>
-              <a:t>Index</a:t>
-            </a:r>
-            <a:r>
-              <a:rPr sz="2300" spc="-85" dirty="0">
-                <a:solidFill>
-                  <a:srgbClr val="2D2D2D"/>
-                </a:solidFill>
-                <a:latin typeface="Arial MT"/>
-                <a:cs typeface="Arial MT"/>
-              </a:rPr>
-              <a:t> </a:t>
-            </a:r>
-            <a:r>
-              <a:rPr sz="2300" spc="-100" dirty="0">
-                <a:solidFill>
-                  <a:srgbClr val="2D2D2D"/>
-                </a:solidFill>
-                <a:latin typeface="Arial MT"/>
-                <a:cs typeface="Arial MT"/>
-              </a:rPr>
-              <a:t>Sean:</a:t>
-            </a:r>
-            <a:r>
-              <a:rPr sz="2300" spc="-50" dirty="0">
-                <a:solidFill>
-                  <a:srgbClr val="2D2D2D"/>
-                </a:solidFill>
-                <a:latin typeface="Arial MT"/>
-                <a:cs typeface="Arial MT"/>
-              </a:rPr>
-              <a:t> </a:t>
-            </a:r>
-            <a:r>
-              <a:rPr sz="2300" spc="50" dirty="0">
-                <a:solidFill>
-                  <a:srgbClr val="313131"/>
-                </a:solidFill>
-                <a:latin typeface="Arial MT"/>
-                <a:cs typeface="Arial MT"/>
-              </a:rPr>
-              <a:t>Najbolji</a:t>
-            </a:r>
-            <a:r>
-              <a:rPr sz="2300" spc="25" dirty="0">
-                <a:solidFill>
-                  <a:srgbClr val="313131"/>
-                </a:solidFill>
-                <a:latin typeface="Arial MT"/>
-                <a:cs typeface="Arial MT"/>
-              </a:rPr>
-              <a:t> </a:t>
-            </a:r>
-            <a:r>
-              <a:rPr sz="2300" spc="-140" dirty="0">
-                <a:solidFill>
-                  <a:srgbClr val="343434"/>
-                </a:solidFill>
-                <a:latin typeface="Arial MT"/>
-                <a:cs typeface="Arial MT"/>
-              </a:rPr>
-              <a:t>za</a:t>
-            </a:r>
-            <a:r>
-              <a:rPr sz="2300" spc="35" dirty="0">
-                <a:solidFill>
-                  <a:srgbClr val="343434"/>
-                </a:solidFill>
-                <a:latin typeface="Arial MT"/>
-                <a:cs typeface="Arial MT"/>
-              </a:rPr>
-              <a:t> </a:t>
-            </a:r>
-            <a:r>
-              <a:rPr sz="2300" dirty="0">
-                <a:solidFill>
-                  <a:srgbClr val="363636"/>
-                </a:solidFill>
-                <a:latin typeface="Arial MT"/>
-                <a:cs typeface="Arial MT"/>
-              </a:rPr>
-              <a:t>visoko</a:t>
-            </a:r>
-            <a:r>
-              <a:rPr sz="2300" spc="40" dirty="0">
-                <a:solidFill>
-                  <a:srgbClr val="363636"/>
-                </a:solidFill>
-                <a:latin typeface="Arial MT"/>
-                <a:cs typeface="Arial MT"/>
-              </a:rPr>
-              <a:t> </a:t>
-            </a:r>
-            <a:r>
-              <a:rPr sz="2300" dirty="0">
-                <a:solidFill>
-                  <a:srgbClr val="313131"/>
-                </a:solidFill>
-                <a:latin typeface="Arial MT"/>
-                <a:cs typeface="Arial MT"/>
-              </a:rPr>
-              <a:t>selektivne</a:t>
-            </a:r>
-            <a:r>
-              <a:rPr sz="2300" spc="15" dirty="0">
-                <a:solidFill>
-                  <a:srgbClr val="313131"/>
-                </a:solidFill>
-                <a:latin typeface="Arial MT"/>
-                <a:cs typeface="Arial MT"/>
-              </a:rPr>
-              <a:t> </a:t>
-            </a:r>
-            <a:r>
-              <a:rPr sz="2300" spc="-10" dirty="0">
-                <a:solidFill>
-                  <a:srgbClr val="2B2B2B"/>
-                </a:solidFill>
-                <a:latin typeface="Arial MT"/>
-                <a:cs typeface="Arial MT"/>
-              </a:rPr>
-              <a:t>upite.</a:t>
-            </a:r>
-            <a:endParaRPr sz="2300" dirty="0">
-              <a:latin typeface="Arial MT"/>
-              <a:cs typeface="Arial MT"/>
-            </a:endParaRPr>
-          </a:p>
-        </p:txBody>
-      </p:sp>
-      <p:sp>
-        <p:nvSpPr>
           <p:cNvPr id="8" name="object 7">
             <a:extLst>
               <a:ext uri="{FF2B5EF4-FFF2-40B4-BE49-F238E27FC236}">
@@ -21667,7 +20707,7 @@
         <p:spPr>
           <a:xfrm>
             <a:off x="1895693" y="4284322"/>
-            <a:ext cx="7631431" cy="3636252"/>
+            <a:ext cx="16233557" cy="2459006"/>
           </a:xfrm>
           <a:prstGeom prst="rect">
             <a:avLst/>

--- a/P1/Index-Only i Bitmap Index Scan u PostgreSQL.pptx
+++ b/P1/Index-Only i Bitmap Index Scan u PostgreSQL.pptx
@@ -9330,7 +9330,7 @@
         <p:spPr>
           <a:xfrm>
             <a:off x="1470663" y="3231997"/>
-            <a:ext cx="7945120" cy="6108980"/>
+            <a:ext cx="7945120" cy="6314164"/>
           </a:xfrm>
           <a:prstGeom prst="rect">
             <a:avLst/>
@@ -9758,6 +9758,71 @@
               <a:t> </a:t>
             </a:r>
             <a:r>
+              <a:rPr sz="2550" b="0" dirty="0" err="1">
+                <a:solidFill>
+                  <a:schemeClr val="tx1">
+                    <a:lumMod val="75000"/>
+                    <a:lumOff val="25000"/>
+                  </a:schemeClr>
+                </a:solidFill>
+                <a:latin typeface="Calibri"/>
+                <a:cs typeface="Calibri"/>
+              </a:rPr>
+              <a:t>nudi</a:t>
+            </a:r>
+            <a:r>
+              <a:rPr sz="2550" b="0" spc="45" dirty="0">
+                <a:solidFill>
+                  <a:schemeClr val="tx1">
+                    <a:lumMod val="75000"/>
+                    <a:lumOff val="25000"/>
+                  </a:schemeClr>
+                </a:solidFill>
+                <a:latin typeface="Calibri"/>
+                <a:cs typeface="Calibri"/>
+              </a:rPr>
+              <a:t> </a:t>
+            </a:r>
+            <a:r>
+              <a:rPr sz="2550" b="0" spc="-10" dirty="0">
+                <a:solidFill>
+                  <a:schemeClr val="tx1">
+                    <a:lumMod val="75000"/>
+                    <a:lumOff val="25000"/>
+                  </a:schemeClr>
+                </a:solidFill>
+                <a:latin typeface="Calibri"/>
+                <a:cs typeface="Calibri"/>
+              </a:rPr>
+              <a:t>mehanizme</a:t>
+            </a:r>
+            <a:r>
+              <a:rPr sz="2550" b="0" spc="114" dirty="0">
+                <a:solidFill>
+                  <a:schemeClr val="tx1">
+                    <a:lumMod val="75000"/>
+                    <a:lumOff val="25000"/>
+                  </a:schemeClr>
+                </a:solidFill>
+                <a:latin typeface="Calibri"/>
+                <a:cs typeface="Calibri"/>
+              </a:rPr>
+              <a:t> </a:t>
+            </a:r>
+            <a:r>
+              <a:rPr sz="2550" b="0" spc="-10" dirty="0">
+                <a:solidFill>
+                  <a:schemeClr val="tx1">
+                    <a:lumMod val="75000"/>
+                    <a:lumOff val="25000"/>
+                  </a:schemeClr>
+                </a:solidFill>
+                <a:latin typeface="Calibri"/>
+                <a:cs typeface="Calibri"/>
+              </a:rPr>
+              <a:t>poput </a:t>
+            </a:r>
+            <a:r>
               <a:rPr sz="2550" b="0" dirty="0">
                 <a:solidFill>
                   <a:schemeClr val="tx1">
@@ -9768,10 +9833,10 @@
                 <a:latin typeface="Calibri"/>
                 <a:cs typeface="Calibri"/>
               </a:rPr>
-              <a:t>nudi</a:t>
-            </a:r>
-            <a:r>
-              <a:rPr sz="2550" b="0" spc="-55" dirty="0">
+              <a:t>Index-Only</a:t>
+            </a:r>
+            <a:r>
+              <a:rPr sz="2550" b="0" spc="155" dirty="0">
                 <a:solidFill>
                   <a:schemeClr val="tx1">
                     <a:lumMod val="75000"/>
@@ -9794,59 +9859,20 @@
                 <a:latin typeface="Calibri"/>
                 <a:cs typeface="Calibri"/>
               </a:rPr>
-              <a:t>sofisticirane</a:t>
-            </a:r>
-            <a:r>
-              <a:rPr sz="2550" b="0" spc="45" dirty="0">
-                <a:solidFill>
-                  <a:schemeClr val="tx1">
-                    <a:lumMod val="75000"/>
-                    <a:lumOff val="25000"/>
-                  </a:schemeClr>
-                </a:solidFill>
-                <a:latin typeface="Calibri"/>
-                <a:cs typeface="Calibri"/>
-              </a:rPr>
-              <a:t> </a:t>
-            </a:r>
-            <a:r>
-              <a:rPr sz="2550" b="0" spc="-10" dirty="0">
-                <a:solidFill>
-                  <a:schemeClr val="tx1">
-                    <a:lumMod val="75000"/>
-                    <a:lumOff val="25000"/>
-                  </a:schemeClr>
-                </a:solidFill>
-                <a:latin typeface="Calibri"/>
-                <a:cs typeface="Calibri"/>
-              </a:rPr>
-              <a:t>mehanizme</a:t>
-            </a:r>
-            <a:r>
-              <a:rPr sz="2550" b="0" spc="114" dirty="0">
-                <a:solidFill>
-                  <a:schemeClr val="tx1">
-                    <a:lumMod val="75000"/>
-                    <a:lumOff val="25000"/>
-                  </a:schemeClr>
-                </a:solidFill>
-                <a:latin typeface="Calibri"/>
-                <a:cs typeface="Calibri"/>
-              </a:rPr>
-              <a:t> </a:t>
-            </a:r>
-            <a:r>
-              <a:rPr sz="2550" b="0" spc="-10" dirty="0">
-                <a:solidFill>
-                  <a:schemeClr val="tx1">
-                    <a:lumMod val="75000"/>
-                    <a:lumOff val="25000"/>
-                  </a:schemeClr>
-                </a:solidFill>
-                <a:latin typeface="Calibri"/>
-                <a:cs typeface="Calibri"/>
-              </a:rPr>
-              <a:t>poput </a:t>
+              <a:t>i</a:t>
+            </a:r>
+            <a:r>
+              <a:rPr sz="2550" b="0" spc="-30" dirty="0">
+                <a:solidFill>
+                  <a:schemeClr val="tx1">
+                    <a:lumMod val="75000"/>
+                    <a:lumOff val="25000"/>
+                  </a:schemeClr>
+                </a:solidFill>
+                <a:latin typeface="Calibri"/>
+                <a:cs typeface="Calibri"/>
+              </a:rPr>
+              <a:t> </a:t>
             </a:r>
             <a:r>
               <a:rPr sz="2550" b="0" dirty="0">
@@ -9859,10 +9885,10 @@
                 <a:latin typeface="Calibri"/>
                 <a:cs typeface="Calibri"/>
               </a:rPr>
-              <a:t>Index-Only</a:t>
-            </a:r>
-            <a:r>
-              <a:rPr sz="2550" b="0" spc="155" dirty="0">
+              <a:t>Bitmap</a:t>
+            </a:r>
+            <a:r>
+              <a:rPr sz="2550" b="0" spc="5" dirty="0">
                 <a:solidFill>
                   <a:schemeClr val="tx1">
                     <a:lumMod val="75000"/>
@@ -9885,10 +9911,10 @@
                 <a:latin typeface="Calibri"/>
                 <a:cs typeface="Calibri"/>
               </a:rPr>
-              <a:t>i</a:t>
-            </a:r>
-            <a:r>
-              <a:rPr sz="2550" b="0" spc="-30" dirty="0">
+              <a:t>Index</a:t>
+            </a:r>
+            <a:r>
+              <a:rPr sz="2550" b="0" spc="60" dirty="0">
                 <a:solidFill>
                   <a:schemeClr val="tx1">
                     <a:lumMod val="75000"/>
@@ -9911,58 +9937,6 @@
                 <a:latin typeface="Calibri"/>
                 <a:cs typeface="Calibri"/>
               </a:rPr>
-              <a:t>Bitmap</a:t>
-            </a:r>
-            <a:r>
-              <a:rPr sz="2550" b="0" spc="5" dirty="0">
-                <a:solidFill>
-                  <a:schemeClr val="tx1">
-                    <a:lumMod val="75000"/>
-                    <a:lumOff val="25000"/>
-                  </a:schemeClr>
-                </a:solidFill>
-                <a:latin typeface="Calibri"/>
-                <a:cs typeface="Calibri"/>
-              </a:rPr>
-              <a:t> </a:t>
-            </a:r>
-            <a:r>
-              <a:rPr sz="2550" b="0" dirty="0">
-                <a:solidFill>
-                  <a:schemeClr val="tx1">
-                    <a:lumMod val="75000"/>
-                    <a:lumOff val="25000"/>
-                  </a:schemeClr>
-                </a:solidFill>
-                <a:latin typeface="Calibri"/>
-                <a:cs typeface="Calibri"/>
-              </a:rPr>
-              <a:t>Index</a:t>
-            </a:r>
-            <a:r>
-              <a:rPr sz="2550" b="0" spc="60" dirty="0">
-                <a:solidFill>
-                  <a:schemeClr val="tx1">
-                    <a:lumMod val="75000"/>
-                    <a:lumOff val="25000"/>
-                  </a:schemeClr>
-                </a:solidFill>
-                <a:latin typeface="Calibri"/>
-                <a:cs typeface="Calibri"/>
-              </a:rPr>
-              <a:t> </a:t>
-            </a:r>
-            <a:r>
-              <a:rPr sz="2550" b="0" dirty="0">
-                <a:solidFill>
-                  <a:schemeClr val="tx1">
-                    <a:lumMod val="75000"/>
-                    <a:lumOff val="25000"/>
-                  </a:schemeClr>
-                </a:solidFill>
-                <a:latin typeface="Calibri"/>
-                <a:cs typeface="Calibri"/>
-              </a:rPr>
               <a:t>Scan-</a:t>
             </a:r>
             <a:r>
@@ -10004,6 +9978,26 @@
               </a:rPr>
               <a:t>.</a:t>
             </a:r>
+            <a:endParaRPr lang="en-US" sz="2550" b="0" spc="-25" dirty="0">
+              <a:solidFill>
+                <a:schemeClr val="tx1">
+                  <a:lumMod val="75000"/>
+                  <a:lumOff val="25000"/>
+                </a:schemeClr>
+              </a:solidFill>
+              <a:latin typeface="Calibri"/>
+              <a:cs typeface="Calibri"/>
+            </a:endParaRPr>
+          </a:p>
+          <a:p>
+            <a:pPr marL="12700" marR="13335" indent="5080">
+              <a:lnSpc>
+                <a:spcPct val="107800"/>
+              </a:lnSpc>
+              <a:spcBef>
+                <a:spcPts val="1605"/>
+              </a:spcBef>
+            </a:pPr>
             <a:endParaRPr sz="2550" dirty="0">
               <a:solidFill>
                 <a:schemeClr val="tx1">

--- a/P1/Index-Only i Bitmap Index Scan u PostgreSQL.pptx
+++ b/P1/Index-Only i Bitmap Index Scan u PostgreSQL.pptx
@@ -1074,7 +1074,7 @@
           <a:p>
             <a:fld id="{1D8BD707-D9CF-40AE-B4C6-C98DA3205C09}" type="datetimeFigureOut">
               <a:rPr lang="en-US"/>
-              <a:t>5/18/2026</a:t>
+              <a:t>5/19/2026</a:t>
             </a:fld>
             <a:endParaRPr lang="en-US"/>
           </a:p>
@@ -1249,7 +1249,7 @@
           <a:p>
             <a:fld id="{1D8BD707-D9CF-40AE-B4C6-C98DA3205C09}" type="datetimeFigureOut">
               <a:rPr lang="en-US"/>
-              <a:t>5/18/2026</a:t>
+              <a:t>5/19/2026</a:t>
             </a:fld>
             <a:endParaRPr lang="en-US"/>
           </a:p>
@@ -1475,7 +1475,7 @@
           <a:p>
             <a:fld id="{1D8BD707-D9CF-40AE-B4C6-C98DA3205C09}" type="datetimeFigureOut">
               <a:rPr lang="en-US"/>
-              <a:t>5/18/2026</a:t>
+              <a:t>5/19/2026</a:t>
             </a:fld>
             <a:endParaRPr lang="en-US"/>
           </a:p>
@@ -1623,7 +1623,7 @@
           <a:p>
             <a:fld id="{1D8BD707-D9CF-40AE-B4C6-C98DA3205C09}" type="datetimeFigureOut">
               <a:rPr lang="en-US"/>
-              <a:t>5/18/2026</a:t>
+              <a:t>5/19/2026</a:t>
             </a:fld>
             <a:endParaRPr lang="en-US"/>
           </a:p>
@@ -1742,7 +1742,7 @@
           <a:p>
             <a:fld id="{1D8BD707-D9CF-40AE-B4C6-C98DA3205C09}" type="datetimeFigureOut">
               <a:rPr lang="en-US"/>
-              <a:t>5/18/2026</a:t>
+              <a:t>5/19/2026</a:t>
             </a:fld>
             <a:endParaRPr lang="en-US"/>
           </a:p>
@@ -2012,7 +2012,7 @@
           <a:p>
             <a:fld id="{1D8BD707-D9CF-40AE-B4C6-C98DA3205C09}" type="datetimeFigureOut">
               <a:rPr lang="en-US"/>
-              <a:t>5/18/2026</a:t>
+              <a:t>5/19/2026</a:t>
             </a:fld>
             <a:endParaRPr lang="en-US"/>
           </a:p>
@@ -4519,7 +4519,7 @@
           <p:nvPr>
             <p:extLst>
               <p:ext uri="{D42A27DB-BD31-4B8C-83A1-F6EECF244321}">
-                <p14:modId xmlns:p14="http://schemas.microsoft.com/office/powerpoint/2010/main" val="1372533164"/>
+                <p14:modId xmlns:p14="http://schemas.microsoft.com/office/powerpoint/2010/main" val="856448102"/>
               </p:ext>
             </p:extLst>
           </p:nvPr>
@@ -8401,7 +8401,7 @@
         <p:spPr>
           <a:xfrm>
             <a:off x="12109450" y="2832332"/>
-            <a:ext cx="6096000" cy="2209800"/>
+            <a:ext cx="6400800" cy="2209800"/>
           </a:xfrm>
           <a:prstGeom prst="rect">
             <a:avLst/>
@@ -8631,7 +8631,26 @@
                 <a:ea typeface="Calibri" pitchFamily="34" charset="-122"/>
                 <a:cs typeface="Calibri" pitchFamily="34" charset="-120"/>
               </a:rPr>
-              <a:t>. Sequential Scan </a:t>
+              <a:t>. </a:t>
+            </a:r>
+          </a:p>
+          <a:p>
+            <a:pPr marL="0" indent="0">
+              <a:buNone/>
+            </a:pPr>
+            <a:r>
+              <a:rPr lang="en-US" sz="2800" dirty="0">
+                <a:solidFill>
+                  <a:schemeClr val="tx1">
+                    <a:lumMod val="75000"/>
+                    <a:lumOff val="25000"/>
+                  </a:schemeClr>
+                </a:solidFill>
+                <a:latin typeface="Calibri" pitchFamily="34" charset="0"/>
+                <a:ea typeface="Calibri" pitchFamily="34" charset="-122"/>
+                <a:cs typeface="Calibri" pitchFamily="34" charset="-120"/>
+              </a:rPr>
+              <a:t>Sequential Scan </a:t>
             </a:r>
             <a:r>
               <a:rPr lang="en-US" sz="2800" dirty="0" err="1">
